--- a/Hakaton_KK.pptx
+++ b/Hakaton_KK.pptx
@@ -4182,8 +4182,8 @@
         </p:nvSpPr>
         <p:spPr>
           <a:xfrm>
-            <a:off x="1524000" y="1122363"/>
-            <a:ext cx="9144000" cy="1427406"/>
+            <a:off x="721129" y="3165229"/>
+            <a:ext cx="5439508" cy="1011115"/>
           </a:xfrm>
         </p:spPr>
         <p:txBody>
@@ -4194,11 +4194,23 @@
           <a:p>
             <a:pPr algn="l"/>
             <a:r>
-              <a:rPr lang="ru-RU" dirty="0" err="1"/>
+              <a:rPr lang="ru-RU" dirty="0" err="1">
+                <a:solidFill>
+                  <a:srgbClr val="1428A0"/>
+                </a:solidFill>
+                <a:latin typeface="Samsung SS Head Bold" pitchFamily="2" charset="0"/>
+                <a:cs typeface="Samsung SS Head Bold" pitchFamily="2" charset="0"/>
+              </a:rPr>
               <a:t>Хакатон</a:t>
             </a:r>
             <a:r>
-              <a:rPr lang="ru-RU" dirty="0"/>
+              <a:rPr lang="ru-RU" dirty="0">
+                <a:solidFill>
+                  <a:srgbClr val="1428A0"/>
+                </a:solidFill>
+                <a:latin typeface="Samsung SS Head Bold" pitchFamily="2" charset="0"/>
+                <a:cs typeface="Samsung SS Head Bold" pitchFamily="2" charset="0"/>
+              </a:rPr>
               <a:t> 2026</a:t>
             </a:r>
           </a:p>
@@ -4222,8 +4234,8 @@
         </p:nvSpPr>
         <p:spPr>
           <a:xfrm>
-            <a:off x="1524000" y="3602038"/>
-            <a:ext cx="9144000" cy="1831608"/>
+            <a:off x="1327799" y="4032860"/>
+            <a:ext cx="6204438" cy="495178"/>
           </a:xfrm>
         </p:spPr>
         <p:txBody>
@@ -4232,14 +4244,328 @@
           </a:bodyPr>
           <a:lstStyle/>
           <a:p>
+            <a:pPr algn="l"/>
+            <a:r>
+              <a:rPr lang="ru-RU" dirty="0">
+                <a:solidFill>
+                  <a:srgbClr val="5995EE"/>
+                </a:solidFill>
+                <a:latin typeface="Samsung SS Body Bold" pitchFamily="2" charset="0"/>
+                <a:cs typeface="Samsung SS Body Bold" pitchFamily="2" charset="0"/>
+              </a:rPr>
+              <a:t>Кейс </a:t>
+            </a:r>
+            <a:r>
+              <a:rPr lang="en-US" dirty="0" err="1">
+                <a:solidFill>
+                  <a:srgbClr val="5995EE"/>
+                </a:solidFill>
+                <a:latin typeface="Samsung SS Body Bold" pitchFamily="2" charset="0"/>
+                <a:cs typeface="Samsung SS Body Bold" pitchFamily="2" charset="0"/>
+              </a:rPr>
+              <a:t>Arenadata</a:t>
+            </a:r>
+            <a:r>
+              <a:rPr lang="en-US" dirty="0">
+                <a:solidFill>
+                  <a:srgbClr val="5995EE"/>
+                </a:solidFill>
+                <a:latin typeface="Samsung SS Body Bold" pitchFamily="2" charset="0"/>
+                <a:cs typeface="Samsung SS Body Bold" pitchFamily="2" charset="0"/>
+              </a:rPr>
+              <a:t>: “</a:t>
+            </a:r>
+            <a:r>
+              <a:rPr lang="ru-RU" dirty="0">
+                <a:solidFill>
+                  <a:srgbClr val="5995EE"/>
+                </a:solidFill>
+                <a:latin typeface="Samsung SS Body Bold" pitchFamily="2" charset="0"/>
+                <a:cs typeface="Samsung SS Body Bold" pitchFamily="2" charset="0"/>
+              </a:rPr>
+              <a:t>Поиск утечек данных</a:t>
+            </a:r>
+            <a:r>
+              <a:rPr lang="en-US" dirty="0">
+                <a:solidFill>
+                  <a:srgbClr val="5995EE"/>
+                </a:solidFill>
+                <a:latin typeface="Samsung SS Body Bold" pitchFamily="2" charset="0"/>
+                <a:cs typeface="Samsung SS Body Bold" pitchFamily="2" charset="0"/>
+              </a:rPr>
+              <a:t>”</a:t>
+            </a:r>
+          </a:p>
+          <a:p>
             <a:pPr algn="r"/>
-            <a:r>
-              <a:rPr lang="ru-RU" dirty="0"/>
+            <a:endParaRPr lang="en-US" dirty="0">
+              <a:solidFill>
+                <a:srgbClr val="5995EE"/>
+              </a:solidFill>
+              <a:latin typeface="Samsung SS Body Bold" pitchFamily="2" charset="0"/>
+              <a:cs typeface="Samsung SS Body Bold" pitchFamily="2" charset="0"/>
+            </a:endParaRPr>
+          </a:p>
+          <a:p>
+            <a:pPr algn="r"/>
+            <a:endParaRPr lang="en-US" dirty="0">
+              <a:solidFill>
+                <a:srgbClr val="5995EE"/>
+              </a:solidFill>
+              <a:latin typeface="Samsung SS Body Bold" pitchFamily="2" charset="0"/>
+              <a:cs typeface="Samsung SS Body Bold" pitchFamily="2" charset="0"/>
+            </a:endParaRPr>
+          </a:p>
+        </p:txBody>
+      </p:sp>
+      <p:sp>
+        <p:nvSpPr>
+          <p:cNvPr id="4" name="TextBox 3">
+            <a:extLst>
+              <a:ext uri="{FF2B5EF4-FFF2-40B4-BE49-F238E27FC236}">
+                <a16:creationId xmlns:a16="http://schemas.microsoft.com/office/drawing/2014/main" id="{CF087DE6-A6B9-4EAF-8152-0D9F247591D2}"/>
+              </a:ext>
+            </a:extLst>
+          </p:cNvPr>
+          <p:cNvSpPr txBox="1"/>
+          <p:nvPr/>
+        </p:nvSpPr>
+        <p:spPr>
+          <a:xfrm>
+            <a:off x="9252530" y="5404955"/>
+            <a:ext cx="2035494" cy="461665"/>
+          </a:xfrm>
+          <a:prstGeom prst="rect">
+            <a:avLst/>
+          </a:prstGeom>
+          <a:noFill/>
+        </p:spPr>
+        <p:txBody>
+          <a:bodyPr wrap="none" rtlCol="0">
+            <a:spAutoFit/>
+          </a:bodyPr>
+          <a:lstStyle/>
+          <a:p>
+            <a:r>
+              <a:rPr lang="ru-RU" sz="2400" dirty="0">
+                <a:solidFill>
+                  <a:srgbClr val="939598"/>
+                </a:solidFill>
+                <a:latin typeface="Samsung SS Body Bold" pitchFamily="2" charset="0"/>
+                <a:cs typeface="Samsung SS Body Bold" pitchFamily="2" charset="0"/>
+              </a:rPr>
               <a:t>Команда КК</a:t>
             </a:r>
           </a:p>
         </p:txBody>
       </p:sp>
+      <p:pic>
+        <p:nvPicPr>
+          <p:cNvPr id="6" name="Рисунок 5">
+            <a:extLst>
+              <a:ext uri="{FF2B5EF4-FFF2-40B4-BE49-F238E27FC236}">
+                <a16:creationId xmlns:a16="http://schemas.microsoft.com/office/drawing/2014/main" id="{739E6C96-237F-4D74-88FC-3BED9B4786D0}"/>
+              </a:ext>
+            </a:extLst>
+          </p:cNvPr>
+          <p:cNvPicPr>
+            <a:picLocks noChangeAspect="1"/>
+          </p:cNvPicPr>
+          <p:nvPr/>
+        </p:nvPicPr>
+        <p:blipFill>
+          <a:blip r:embed="rId2">
+            <a:extLst>
+              <a:ext uri="{28A0092B-C50C-407E-A947-70E740481C1C}">
+                <a14:useLocalDpi xmlns:a14="http://schemas.microsoft.com/office/drawing/2010/main" val="0"/>
+              </a:ext>
+            </a:extLst>
+          </a:blip>
+          <a:stretch>
+            <a:fillRect/>
+          </a:stretch>
+        </p:blipFill>
+        <p:spPr>
+          <a:xfrm>
+            <a:off x="9278404" y="424105"/>
+            <a:ext cx="1983746" cy="1904922"/>
+          </a:xfrm>
+          <a:prstGeom prst="rect">
+            <a:avLst/>
+          </a:prstGeom>
+        </p:spPr>
+      </p:pic>
+      <p:sp>
+        <p:nvSpPr>
+          <p:cNvPr id="7" name="TextBox 6">
+            <a:extLst>
+              <a:ext uri="{FF2B5EF4-FFF2-40B4-BE49-F238E27FC236}">
+                <a16:creationId xmlns:a16="http://schemas.microsoft.com/office/drawing/2014/main" id="{F97061B9-F522-4631-98B9-96998DBBF666}"/>
+              </a:ext>
+            </a:extLst>
+          </p:cNvPr>
+          <p:cNvSpPr txBox="1"/>
+          <p:nvPr/>
+        </p:nvSpPr>
+        <p:spPr>
+          <a:xfrm>
+            <a:off x="623870" y="430106"/>
+            <a:ext cx="2468946" cy="646331"/>
+          </a:xfrm>
+          <a:prstGeom prst="rect">
+            <a:avLst/>
+          </a:prstGeom>
+          <a:noFill/>
+        </p:spPr>
+        <p:txBody>
+          <a:bodyPr wrap="none" rtlCol="0">
+            <a:spAutoFit/>
+          </a:bodyPr>
+          <a:lstStyle/>
+          <a:p>
+            <a:r>
+              <a:rPr lang="ru-RU" dirty="0">
+                <a:solidFill>
+                  <a:srgbClr val="1428A0"/>
+                </a:solidFill>
+                <a:latin typeface="Samsung SS Body Bold" pitchFamily="2" charset="0"/>
+                <a:cs typeface="Samsung SS Body Bold" pitchFamily="2" charset="0"/>
+              </a:rPr>
+              <a:t>Кампус</a:t>
+            </a:r>
+            <a:endParaRPr lang="en-US" dirty="0">
+              <a:solidFill>
+                <a:srgbClr val="1428A0"/>
+              </a:solidFill>
+              <a:latin typeface="Samsung SS Body Bold" pitchFamily="2" charset="0"/>
+              <a:cs typeface="Samsung SS Body Bold" pitchFamily="2" charset="0"/>
+            </a:endParaRPr>
+          </a:p>
+          <a:p>
+            <a:r>
+              <a:rPr lang="ru-RU" dirty="0">
+                <a:solidFill>
+                  <a:srgbClr val="1428A0"/>
+                </a:solidFill>
+                <a:latin typeface="Samsung SS Body Bold" pitchFamily="2" charset="0"/>
+                <a:cs typeface="Samsung SS Body Bold" pitchFamily="2" charset="0"/>
+              </a:rPr>
+              <a:t>инноваций </a:t>
+            </a:r>
+            <a:r>
+              <a:rPr lang="en-US" dirty="0">
+                <a:solidFill>
+                  <a:srgbClr val="1428A0"/>
+                </a:solidFill>
+                <a:latin typeface="Samsung SS Body Bold" pitchFamily="2" charset="0"/>
+                <a:cs typeface="Samsung SS Body Bold" pitchFamily="2" charset="0"/>
+              </a:rPr>
+              <a:t>Samsung</a:t>
+            </a:r>
+            <a:endParaRPr lang="ru-RU" dirty="0">
+              <a:solidFill>
+                <a:srgbClr val="1428A0"/>
+              </a:solidFill>
+              <a:latin typeface="Samsung SS Body Bold" pitchFamily="2" charset="0"/>
+              <a:cs typeface="Samsung SS Body Bold" pitchFamily="2" charset="0"/>
+            </a:endParaRPr>
+          </a:p>
+        </p:txBody>
+      </p:sp>
+      <p:pic>
+        <p:nvPicPr>
+          <p:cNvPr id="1028" name="Picture 4" descr="Picture background">
+            <a:extLst>
+              <a:ext uri="{FF2B5EF4-FFF2-40B4-BE49-F238E27FC236}">
+                <a16:creationId xmlns:a16="http://schemas.microsoft.com/office/drawing/2014/main" id="{6E910698-E0B0-4FD5-8574-EB4C99CD25EF}"/>
+              </a:ext>
+            </a:extLst>
+          </p:cNvPr>
+          <p:cNvPicPr>
+            <a:picLocks noChangeAspect="1" noChangeArrowheads="1"/>
+          </p:cNvPicPr>
+          <p:nvPr/>
+        </p:nvPicPr>
+        <p:blipFill>
+          <a:blip r:embed="rId3">
+            <a:extLst>
+              <a:ext uri="{28A0092B-C50C-407E-A947-70E740481C1C}">
+                <a14:useLocalDpi xmlns:a14="http://schemas.microsoft.com/office/drawing/2010/main" val="0"/>
+              </a:ext>
+            </a:extLst>
+          </a:blip>
+          <a:srcRect/>
+          <a:stretch>
+            <a:fillRect/>
+          </a:stretch>
+        </p:blipFill>
+        <p:spPr bwMode="auto">
+          <a:xfrm>
+            <a:off x="4128005" y="424105"/>
+            <a:ext cx="3559544" cy="652332"/>
+          </a:xfrm>
+          <a:prstGeom prst="rect">
+            <a:avLst/>
+          </a:prstGeom>
+          <a:noFill/>
+          <a:extLst>
+            <a:ext uri="{909E8E84-426E-40DD-AFC4-6F175D3DCCD1}">
+              <a14:hiddenFill xmlns:a14="http://schemas.microsoft.com/office/drawing/2010/main">
+                <a:solidFill>
+                  <a:srgbClr val="FFFFFF"/>
+                </a:solidFill>
+              </a14:hiddenFill>
+            </a:ext>
+          </a:extLst>
+        </p:spPr>
+      </p:pic>
+      <p:pic>
+        <p:nvPicPr>
+          <p:cNvPr id="1030" name="Picture 6" descr="Picture background">
+            <a:extLst>
+              <a:ext uri="{FF2B5EF4-FFF2-40B4-BE49-F238E27FC236}">
+                <a16:creationId xmlns:a16="http://schemas.microsoft.com/office/drawing/2014/main" id="{718F943E-25DB-4311-BB41-439AE68BFA7D}"/>
+              </a:ext>
+            </a:extLst>
+          </p:cNvPr>
+          <p:cNvPicPr>
+            <a:picLocks noChangeAspect="1" noChangeArrowheads="1"/>
+          </p:cNvPicPr>
+          <p:nvPr/>
+        </p:nvPicPr>
+        <p:blipFill>
+          <a:blip r:embed="rId4">
+            <a:extLst>
+              <a:ext uri="{28A0092B-C50C-407E-A947-70E740481C1C}">
+                <a14:useLocalDpi xmlns:a14="http://schemas.microsoft.com/office/drawing/2010/main" val="0"/>
+              </a:ext>
+            </a:extLst>
+          </a:blip>
+          <a:srcRect/>
+          <a:stretch>
+            <a:fillRect/>
+          </a:stretch>
+        </p:blipFill>
+        <p:spPr bwMode="auto">
+          <a:xfrm>
+            <a:off x="4683671" y="1076437"/>
+            <a:ext cx="2906619" cy="1651488"/>
+          </a:xfrm>
+          <a:prstGeom prst="rect">
+            <a:avLst/>
+          </a:prstGeom>
+          <a:noFill/>
+          <a:extLst>
+            <a:ext uri="{909E8E84-426E-40DD-AFC4-6F175D3DCCD1}">
+              <a14:hiddenFill xmlns:a14="http://schemas.microsoft.com/office/drawing/2010/main">
+                <a:solidFill>
+                  <a:srgbClr val="FFFFFF"/>
+                </a:solidFill>
+              </a14:hiddenFill>
+            </a:ext>
+          </a:extLst>
+        </p:spPr>
+      </p:pic>
     </p:spTree>
     <p:extLst>
       <p:ext uri="{BB962C8B-B14F-4D97-AF65-F5344CB8AC3E}">
@@ -4297,7 +4623,13 @@
           <a:lstStyle/>
           <a:p>
             <a:r>
-              <a:rPr lang="ru-RU" dirty="0"/>
+              <a:rPr lang="ru-RU" dirty="0">
+                <a:solidFill>
+                  <a:srgbClr val="333333"/>
+                </a:solidFill>
+                <a:latin typeface="Samsung SS Head Bold" pitchFamily="2" charset="0"/>
+                <a:cs typeface="Samsung SS Head Bold" pitchFamily="2" charset="0"/>
+              </a:rPr>
               <a:t>Итоги обработки файлов</a:t>
             </a:r>
           </a:p>
@@ -4332,7 +4664,13 @@
           <a:lstStyle/>
           <a:p>
             <a:r>
-              <a:rPr lang="ru-RU" dirty="0"/>
+              <a:rPr lang="ru-RU" dirty="0">
+                <a:solidFill>
+                  <a:srgbClr val="4D4D4D"/>
+                </a:solidFill>
+                <a:latin typeface="Samsung SS Body Bold" pitchFamily="2" charset="0"/>
+                <a:cs typeface="Samsung SS Body Bold" pitchFamily="2" charset="0"/>
+              </a:rPr>
               <a:t>Обработка программы</a:t>
             </a:r>
           </a:p>
@@ -4365,34 +4703,74 @@
           <a:lstStyle/>
           <a:p>
             <a:r>
-              <a:rPr lang="ru-RU" dirty="0"/>
+              <a:rPr lang="ru-RU" dirty="0">
+                <a:solidFill>
+                  <a:srgbClr val="5F5F5F"/>
+                </a:solidFill>
+                <a:latin typeface="Samsung SS Body Light" pitchFamily="2" charset="0"/>
+                <a:cs typeface="Samsung SS Body Light" pitchFamily="2" charset="0"/>
+              </a:rPr>
               <a:t>Найдено </a:t>
             </a:r>
             <a:r>
-              <a:rPr lang="ru-RU" dirty="0" err="1"/>
+              <a:rPr lang="ru-RU" dirty="0" err="1">
+                <a:solidFill>
+                  <a:srgbClr val="5F5F5F"/>
+                </a:solidFill>
+                <a:latin typeface="Samsung SS Body Light" pitchFamily="2" charset="0"/>
+                <a:cs typeface="Samsung SS Body Light" pitchFamily="2" charset="0"/>
+              </a:rPr>
               <a:t>ПДн</a:t>
             </a:r>
             <a:r>
-              <a:rPr lang="ru-RU" dirty="0"/>
+              <a:rPr lang="ru-RU" dirty="0">
+                <a:solidFill>
+                  <a:srgbClr val="5F5F5F"/>
+                </a:solidFill>
+                <a:latin typeface="Samsung SS Body Light" pitchFamily="2" charset="0"/>
+                <a:cs typeface="Samsung SS Body Light" pitchFamily="2" charset="0"/>
+              </a:rPr>
               <a:t> файлов: 24</a:t>
             </a:r>
           </a:p>
           <a:p>
             <a:r>
-              <a:rPr lang="ru-RU" dirty="0"/>
+              <a:rPr lang="ru-RU" dirty="0">
+                <a:solidFill>
+                  <a:srgbClr val="5F5F5F"/>
+                </a:solidFill>
+                <a:latin typeface="Samsung SS Body Light" pitchFamily="2" charset="0"/>
+                <a:cs typeface="Samsung SS Body Light" pitchFamily="2" charset="0"/>
+              </a:rPr>
               <a:t>Результат: ≈</a:t>
             </a:r>
             <a:r>
-              <a:rPr lang="en-US" dirty="0"/>
+              <a:rPr lang="en-US" dirty="0">
+                <a:solidFill>
+                  <a:srgbClr val="5F5F5F"/>
+                </a:solidFill>
+                <a:latin typeface="Samsung SS Body Light" pitchFamily="2" charset="0"/>
+                <a:cs typeface="Samsung SS Body Light" pitchFamily="2" charset="0"/>
+              </a:rPr>
               <a:t>0.06</a:t>
             </a:r>
-            <a:endParaRPr lang="ru-RU" dirty="0"/>
+            <a:endParaRPr lang="ru-RU" dirty="0">
+              <a:solidFill>
+                <a:srgbClr val="5F5F5F"/>
+              </a:solidFill>
+              <a:latin typeface="Samsung SS Body Light" pitchFamily="2" charset="0"/>
+              <a:cs typeface="Samsung SS Body Light" pitchFamily="2" charset="0"/>
+            </a:endParaRPr>
           </a:p>
           <a:p>
             <a:pPr marL="0" indent="0">
               <a:buNone/>
             </a:pPr>
-            <a:endParaRPr lang="ru-RU" dirty="0"/>
+            <a:endParaRPr lang="ru-RU" dirty="0">
+              <a:solidFill>
+                <a:srgbClr val="5F5F5F"/>
+              </a:solidFill>
+            </a:endParaRPr>
           </a:p>
         </p:txBody>
       </p:sp>
@@ -4425,13 +4803,25 @@
           <a:lstStyle/>
           <a:p>
             <a:r>
-              <a:rPr lang="ru-RU" dirty="0"/>
+              <a:rPr lang="ru-RU" dirty="0">
+                <a:solidFill>
+                  <a:srgbClr val="4D4D4D"/>
+                </a:solidFill>
+                <a:latin typeface="Samsung SS Body Bold" pitchFamily="2" charset="0"/>
+                <a:cs typeface="Samsung SS Body Bold" pitchFamily="2" charset="0"/>
+              </a:rPr>
               <a:t>Обработка программы + </a:t>
             </a:r>
           </a:p>
           <a:p>
             <a:r>
-              <a:rPr lang="ru-RU" dirty="0"/>
+              <a:rPr lang="ru-RU" dirty="0">
+                <a:solidFill>
+                  <a:srgbClr val="4D4D4D"/>
+                </a:solidFill>
+                <a:latin typeface="Samsung SS Body Bold" pitchFamily="2" charset="0"/>
+                <a:cs typeface="Samsung SS Body Bold" pitchFamily="2" charset="0"/>
+              </a:rPr>
               <a:t>Ручная проверка файлов</a:t>
             </a:r>
           </a:p>
@@ -4464,20 +4854,44 @@
           <a:lstStyle/>
           <a:p>
             <a:r>
-              <a:rPr lang="ru-RU" dirty="0"/>
+              <a:rPr lang="ru-RU" dirty="0">
+                <a:solidFill>
+                  <a:srgbClr val="5F5F5F"/>
+                </a:solidFill>
+                <a:latin typeface="Samsung SS Body Light" pitchFamily="2" charset="0"/>
+                <a:cs typeface="Samsung SS Body Light" pitchFamily="2" charset="0"/>
+              </a:rPr>
               <a:t>После обработки осталось файлов: 4</a:t>
             </a:r>
           </a:p>
           <a:p>
             <a:r>
-              <a:rPr lang="ru-RU" dirty="0"/>
+              <a:rPr lang="ru-RU" dirty="0">
+                <a:solidFill>
+                  <a:srgbClr val="5F5F5F"/>
+                </a:solidFill>
+                <a:latin typeface="Samsung SS Body Light" pitchFamily="2" charset="0"/>
+                <a:cs typeface="Samsung SS Body Light" pitchFamily="2" charset="0"/>
+              </a:rPr>
               <a:t>Результат</a:t>
             </a:r>
             <a:r>
-              <a:rPr lang="en-US" dirty="0"/>
+              <a:rPr lang="en-US" dirty="0">
+                <a:solidFill>
+                  <a:srgbClr val="5F5F5F"/>
+                </a:solidFill>
+                <a:latin typeface="Samsung SS Body Light" pitchFamily="2" charset="0"/>
+                <a:cs typeface="Samsung SS Body Light" pitchFamily="2" charset="0"/>
+              </a:rPr>
               <a:t>: 0.114</a:t>
             </a:r>
-            <a:endParaRPr lang="ru-RU" dirty="0"/>
+            <a:endParaRPr lang="ru-RU" dirty="0">
+              <a:solidFill>
+                <a:srgbClr val="5F5F5F"/>
+              </a:solidFill>
+              <a:latin typeface="Samsung SS Body Light" pitchFamily="2" charset="0"/>
+              <a:cs typeface="Samsung SS Body Light" pitchFamily="2" charset="0"/>
+            </a:endParaRPr>
           </a:p>
         </p:txBody>
       </p:sp>
@@ -4561,7 +4975,13 @@
           <a:lstStyle/>
           <a:p>
             <a:r>
-              <a:rPr lang="ru-RU" dirty="0"/>
+              <a:rPr lang="ru-RU" dirty="0">
+                <a:solidFill>
+                  <a:srgbClr val="333333"/>
+                </a:solidFill>
+                <a:latin typeface="Samsung SS Head Bold" pitchFamily="2" charset="0"/>
+                <a:cs typeface="Samsung SS Head Bold" pitchFamily="2" charset="0"/>
+              </a:rPr>
               <a:t>Результаты</a:t>
             </a:r>
           </a:p>
@@ -4601,7 +5021,11 @@
             </a:pPr>
             <a:r>
               <a:rPr lang="ru-RU" altLang="ru-RU" dirty="0">
-                <a:latin typeface="Arial" panose="020B0604020202020204" pitchFamily="34" charset="0"/>
+                <a:solidFill>
+                  <a:srgbClr val="5F5F5F"/>
+                </a:solidFill>
+                <a:latin typeface="Samsung SS Body Light" pitchFamily="2" charset="0"/>
+                <a:cs typeface="Samsung SS Body Light" pitchFamily="2" charset="0"/>
               </a:rPr>
               <a:t>Реализован обход файловой системы </a:t>
             </a:r>
@@ -4620,7 +5044,11 @@
             </a:pPr>
             <a:r>
               <a:rPr lang="ru-RU" altLang="ru-RU" dirty="0">
-                <a:latin typeface="Arial" panose="020B0604020202020204" pitchFamily="34" charset="0"/>
+                <a:solidFill>
+                  <a:srgbClr val="5F5F5F"/>
+                </a:solidFill>
+                <a:latin typeface="Samsung SS Body Light" pitchFamily="2" charset="0"/>
+                <a:cs typeface="Samsung SS Body Light" pitchFamily="2" charset="0"/>
               </a:rPr>
               <a:t>Обработаны файлы различных форматов </a:t>
             </a:r>
@@ -4639,7 +5067,11 @@
             </a:pPr>
             <a:r>
               <a:rPr lang="ru-RU" altLang="ru-RU" dirty="0">
-                <a:latin typeface="Arial" panose="020B0604020202020204" pitchFamily="34" charset="0"/>
+                <a:solidFill>
+                  <a:srgbClr val="5F5F5F"/>
+                </a:solidFill>
+                <a:latin typeface="Samsung SS Body Light" pitchFamily="2" charset="0"/>
+                <a:cs typeface="Samsung SS Body Light" pitchFamily="2" charset="0"/>
               </a:rPr>
               <a:t>Извлечение текста из документов и изображений успешно</a:t>
             </a:r>
@@ -4658,18 +5090,30 @@
             </a:pPr>
             <a:r>
               <a:rPr lang="ru-RU" altLang="ru-RU" dirty="0">
-                <a:latin typeface="Arial" panose="020B0604020202020204" pitchFamily="34" charset="0"/>
+                <a:solidFill>
+                  <a:srgbClr val="5F5F5F"/>
+                </a:solidFill>
+                <a:latin typeface="Samsung SS Body Light" pitchFamily="2" charset="0"/>
+                <a:cs typeface="Samsung SS Body Light" pitchFamily="2" charset="0"/>
               </a:rPr>
               <a:t>Реализован прототип механизма обнаружения </a:t>
             </a:r>
             <a:br>
               <a:rPr lang="ru-RU" altLang="ru-RU" dirty="0">
-                <a:latin typeface="Arial" panose="020B0604020202020204" pitchFamily="34" charset="0"/>
+                <a:solidFill>
+                  <a:srgbClr val="5F5F5F"/>
+                </a:solidFill>
+                <a:latin typeface="Samsung SS Body Light" pitchFamily="2" charset="0"/>
+                <a:cs typeface="Samsung SS Body Light" pitchFamily="2" charset="0"/>
               </a:rPr>
             </a:br>
             <a:r>
               <a:rPr lang="ru-RU" altLang="ru-RU" dirty="0">
-                <a:latin typeface="Arial" panose="020B0604020202020204" pitchFamily="34" charset="0"/>
+                <a:solidFill>
+                  <a:srgbClr val="5F5F5F"/>
+                </a:solidFill>
+                <a:latin typeface="Samsung SS Body Light" pitchFamily="2" charset="0"/>
+                <a:cs typeface="Samsung SS Body Light" pitchFamily="2" charset="0"/>
               </a:rPr>
               <a:t>персональных данных</a:t>
             </a:r>
@@ -4688,50 +5132,17 @@
             </a:pPr>
             <a:r>
               <a:rPr lang="ru-RU" dirty="0">
-                <a:latin typeface="Arial" panose="020B0604020202020204" pitchFamily="34" charset="0"/>
+                <a:solidFill>
+                  <a:srgbClr val="5F5F5F"/>
+                </a:solidFill>
+                <a:latin typeface="Samsung SS Body Light" pitchFamily="2" charset="0"/>
+                <a:cs typeface="Samsung SS Body Light" pitchFamily="2" charset="0"/>
               </a:rPr>
               <a:t>Получен результат: 0.114</a:t>
             </a:r>
-            <a:endParaRPr lang="ru-RU" dirty="0"/>
-          </a:p>
-        </p:txBody>
-      </p:sp>
-      <p:pic>
-        <p:nvPicPr>
-          <p:cNvPr id="5" name="Рисунок 4">
-            <a:extLst>
-              <a:ext uri="{FF2B5EF4-FFF2-40B4-BE49-F238E27FC236}">
-                <a16:creationId xmlns:a16="http://schemas.microsoft.com/office/drawing/2014/main" id="{B56FF4C3-139C-42E0-9077-9008E0FE6E21}"/>
-              </a:ext>
-            </a:extLst>
-          </p:cNvPr>
-          <p:cNvPicPr>
-            <a:picLocks noChangeAspect="1"/>
-          </p:cNvPicPr>
-          <p:nvPr/>
-        </p:nvPicPr>
-        <p:blipFill>
-          <a:blip r:embed="rId2">
-            <a:extLst>
-              <a:ext uri="{28A0092B-C50C-407E-A947-70E740481C1C}">
-                <a14:useLocalDpi xmlns:a14="http://schemas.microsoft.com/office/drawing/2010/main" val="0"/>
-              </a:ext>
-            </a:extLst>
-          </a:blip>
-          <a:stretch>
-            <a:fillRect/>
-          </a:stretch>
-        </p:blipFill>
-        <p:spPr>
-          <a:xfrm>
-            <a:off x="8270631" y="4180498"/>
-            <a:ext cx="3083169" cy="2312377"/>
-          </a:xfrm>
-          <a:prstGeom prst="rect">
-            <a:avLst/>
-          </a:prstGeom>
-        </p:spPr>
-      </p:pic>
+          </a:p>
+        </p:txBody>
+      </p:sp>
     </p:spTree>
     <p:extLst>
       <p:ext uri="{BB962C8B-B14F-4D97-AF65-F5344CB8AC3E}">
@@ -4784,7 +5195,13 @@
           <a:lstStyle/>
           <a:p>
             <a:r>
-              <a:rPr lang="ru-RU" dirty="0"/>
+              <a:rPr lang="ru-RU" dirty="0">
+                <a:solidFill>
+                  <a:srgbClr val="333333"/>
+                </a:solidFill>
+                <a:latin typeface="Samsung SS Head Bold" pitchFamily="2" charset="0"/>
+                <a:cs typeface="Samsung SS Head Bold" pitchFamily="2" charset="0"/>
+              </a:rPr>
               <a:t>Выводы</a:t>
             </a:r>
           </a:p>
@@ -4812,13 +5229,25 @@
           <a:lstStyle/>
           <a:p>
             <a:r>
-              <a:rPr lang="ru-RU" dirty="0"/>
+              <a:rPr lang="ru-RU" dirty="0">
+                <a:solidFill>
+                  <a:srgbClr val="5F5F5F"/>
+                </a:solidFill>
+                <a:latin typeface="Samsung SS Body Light" pitchFamily="2" charset="0"/>
+                <a:cs typeface="Samsung SS Body Light" pitchFamily="2" charset="0"/>
+              </a:rPr>
               <a:t>В ходе работы был реализован прототип системы, позволяющий автоматически анализировать неструктурированные данные и выявлять персональные данные.</a:t>
             </a:r>
           </a:p>
           <a:p>
             <a:r>
-              <a:rPr lang="ru-RU" dirty="0"/>
+              <a:rPr lang="ru-RU" dirty="0">
+                <a:solidFill>
+                  <a:srgbClr val="5F5F5F"/>
+                </a:solidFill>
+                <a:latin typeface="Samsung SS Body Light" pitchFamily="2" charset="0"/>
+                <a:cs typeface="Samsung SS Body Light" pitchFamily="2" charset="0"/>
+              </a:rPr>
               <a:t>Полученные результаты подтверждают работоспособность подхода и возможность его дальнейшего развития.</a:t>
             </a:r>
           </a:p>
@@ -4877,7 +5306,13 @@
           <a:p>
             <a:pPr algn="ctr"/>
             <a:r>
-              <a:rPr lang="ru-RU" dirty="0"/>
+              <a:rPr lang="ru-RU" dirty="0">
+                <a:solidFill>
+                  <a:srgbClr val="4D4D4D"/>
+                </a:solidFill>
+                <a:latin typeface="Samsung SS Head Bold" pitchFamily="2" charset="0"/>
+                <a:cs typeface="Samsung SS Head Bold" pitchFamily="2" charset="0"/>
+              </a:rPr>
               <a:t>Спасибо за внимание</a:t>
             </a:r>
           </a:p>
@@ -4967,15 +5402,33 @@
             <p:ph type="title"/>
           </p:nvPr>
         </p:nvSpPr>
-        <p:spPr/>
+        <p:spPr>
+          <a:xfrm>
+            <a:off x="839788" y="992186"/>
+            <a:ext cx="3932237" cy="1065213"/>
+          </a:xfrm>
+        </p:spPr>
         <p:txBody>
           <a:bodyPr/>
           <a:lstStyle/>
           <a:p>
             <a:pPr algn="ctr"/>
             <a:r>
-              <a:rPr lang="ru-RU" dirty="0"/>
-              <a:t>Формулировка задачи</a:t>
+              <a:rPr lang="ru-RU" dirty="0">
+                <a:solidFill>
+                  <a:srgbClr val="333333"/>
+                </a:solidFill>
+                <a:latin typeface="Samsung SS Head Bold" pitchFamily="2" charset="0"/>
+                <a:cs typeface="Samsung SS Head Bold" pitchFamily="2" charset="0"/>
+              </a:rPr>
+              <a:t>Формулировка</a:t>
+            </a:r>
+            <a:r>
+              <a:rPr lang="ru-RU" dirty="0">
+                <a:latin typeface="Samsung SS Head Bold" pitchFamily="2" charset="0"/>
+                <a:cs typeface="Samsung SS Head Bold" pitchFamily="2" charset="0"/>
+              </a:rPr>
+              <a:t> задачи</a:t>
             </a:r>
           </a:p>
         </p:txBody>
@@ -4996,7 +5449,12 @@
             <p:ph idx="1"/>
           </p:nvPr>
         </p:nvSpPr>
-        <p:spPr/>
+        <p:spPr>
+          <a:xfrm>
+            <a:off x="5376619" y="992187"/>
+            <a:ext cx="6172200" cy="4873625"/>
+          </a:xfrm>
+        </p:spPr>
         <p:txBody>
           <a:bodyPr>
             <a:normAutofit lnSpcReduction="10000"/>
@@ -5007,63 +5465,127 @@
               <a:buNone/>
             </a:pPr>
             <a:r>
-              <a:rPr lang="ru-RU" sz="2400" b="1" dirty="0"/>
+              <a:rPr lang="ru-RU" sz="2400" b="1" dirty="0">
+                <a:solidFill>
+                  <a:srgbClr val="333333"/>
+                </a:solidFill>
+                <a:latin typeface="Samsung SS Body Bold" pitchFamily="2" charset="0"/>
+                <a:cs typeface="Samsung SS Body Bold" pitchFamily="2" charset="0"/>
+              </a:rPr>
               <a:t>Проблема</a:t>
             </a:r>
           </a:p>
           <a:p>
             <a:r>
-              <a:rPr lang="ru-RU" sz="2400" dirty="0"/>
+              <a:rPr lang="ru-RU" sz="2400" dirty="0">
+                <a:solidFill>
+                  <a:srgbClr val="5F5F5F"/>
+                </a:solidFill>
+                <a:latin typeface="Samsung SS Body Light" pitchFamily="2" charset="0"/>
+                <a:cs typeface="Samsung SS Body Light" pitchFamily="2" charset="0"/>
+              </a:rPr>
               <a:t>В корпоративных хранилищах накапливаются тысячи файлов без структуры</a:t>
             </a:r>
           </a:p>
           <a:p>
             <a:r>
-              <a:rPr lang="ru-RU" sz="2400" dirty="0"/>
+              <a:rPr lang="ru-RU" sz="2400" dirty="0">
+                <a:solidFill>
+                  <a:srgbClr val="5F5F5F"/>
+                </a:solidFill>
+                <a:latin typeface="Samsung SS Body Light" pitchFamily="2" charset="0"/>
+                <a:cs typeface="Samsung SS Body Light" pitchFamily="2" charset="0"/>
+              </a:rPr>
               <a:t>Отсутствует классификация данных</a:t>
             </a:r>
           </a:p>
           <a:p>
             <a:r>
-              <a:rPr lang="ru-RU" sz="2400" dirty="0"/>
+              <a:rPr lang="ru-RU" sz="2400" dirty="0">
+                <a:solidFill>
+                  <a:srgbClr val="5F5F5F"/>
+                </a:solidFill>
+                <a:latin typeface="Samsung SS Body Light" pitchFamily="2" charset="0"/>
+                <a:cs typeface="Samsung SS Body Light" pitchFamily="2" charset="0"/>
+              </a:rPr>
               <a:t>Возможное наличие персональных данных (</a:t>
             </a:r>
             <a:r>
-              <a:rPr lang="ru-RU" sz="2400" dirty="0" err="1"/>
+              <a:rPr lang="ru-RU" sz="2400" dirty="0" err="1">
+                <a:solidFill>
+                  <a:srgbClr val="5F5F5F"/>
+                </a:solidFill>
+                <a:latin typeface="Samsung SS Body Light" pitchFamily="2" charset="0"/>
+                <a:cs typeface="Samsung SS Body Light" pitchFamily="2" charset="0"/>
+              </a:rPr>
               <a:t>ПДн</a:t>
             </a:r>
             <a:r>
-              <a:rPr lang="ru-RU" sz="2400" dirty="0"/>
+              <a:rPr lang="ru-RU" sz="2400" dirty="0">
+                <a:solidFill>
+                  <a:srgbClr val="5F5F5F"/>
+                </a:solidFill>
+                <a:latin typeface="Samsung SS Body Light" pitchFamily="2" charset="0"/>
+                <a:cs typeface="Samsung SS Body Light" pitchFamily="2" charset="0"/>
+              </a:rPr>
               <a:t>)</a:t>
             </a:r>
           </a:p>
           <a:p>
-            <a:endParaRPr lang="ru-RU" sz="2400" dirty="0"/>
+            <a:endParaRPr lang="ru-RU" sz="2400" dirty="0">
+              <a:solidFill>
+                <a:srgbClr val="333333"/>
+              </a:solidFill>
+            </a:endParaRPr>
           </a:p>
           <a:p>
             <a:pPr marL="0" indent="0">
               <a:buNone/>
             </a:pPr>
             <a:r>
-              <a:rPr lang="ru-RU" sz="2400" b="1" dirty="0"/>
+              <a:rPr lang="ru-RU" sz="2400" b="1" dirty="0">
+                <a:solidFill>
+                  <a:srgbClr val="333333"/>
+                </a:solidFill>
+                <a:latin typeface="Samsung SS Body Bold" pitchFamily="2" charset="0"/>
+                <a:cs typeface="Samsung SS Body Bold" pitchFamily="2" charset="0"/>
+              </a:rPr>
               <a:t>Риски:</a:t>
             </a:r>
           </a:p>
           <a:p>
             <a:r>
-              <a:rPr lang="ru-RU" sz="2400" dirty="0"/>
+              <a:rPr lang="ru-RU" sz="2400" dirty="0">
+                <a:solidFill>
+                  <a:srgbClr val="5F5F5F"/>
+                </a:solidFill>
+                <a:latin typeface="Samsung SS Body Light" pitchFamily="2" charset="0"/>
+                <a:cs typeface="Samsung SS Body Light" pitchFamily="2" charset="0"/>
+              </a:rPr>
               <a:t>Нарушение 152-ФЗ </a:t>
             </a:r>
           </a:p>
           <a:p>
             <a:r>
-              <a:rPr lang="ru-RU" sz="2400" dirty="0"/>
+              <a:rPr lang="ru-RU" sz="2400" dirty="0">
+                <a:solidFill>
+                  <a:srgbClr val="5F5F5F"/>
+                </a:solidFill>
+                <a:latin typeface="Samsung SS Body Light" pitchFamily="2" charset="0"/>
+                <a:cs typeface="Samsung SS Body Light" pitchFamily="2" charset="0"/>
+              </a:rPr>
               <a:t>Штрафы и санкции </a:t>
             </a:r>
           </a:p>
           <a:p>
             <a:r>
-              <a:rPr lang="ru-RU" sz="2400" dirty="0"/>
+              <a:rPr lang="ru-RU" sz="2400" dirty="0">
+                <a:solidFill>
+                  <a:srgbClr val="5F5F5F"/>
+                </a:solidFill>
+                <a:latin typeface="Samsung SS Body Light" pitchFamily="2" charset="0"/>
+                <a:cs typeface="Samsung SS Body Light" pitchFamily="2" charset="0"/>
+              </a:rPr>
               <a:t>Репутационные потери</a:t>
             </a:r>
           </a:p>
@@ -5172,7 +5694,13 @@
           <a:p>
             <a:pPr algn="ctr"/>
             <a:r>
-              <a:rPr lang="ru-RU" dirty="0"/>
+              <a:rPr lang="ru-RU" dirty="0">
+                <a:solidFill>
+                  <a:srgbClr val="333333"/>
+                </a:solidFill>
+                <a:latin typeface="Samsung SS Head Bold" pitchFamily="2" charset="0"/>
+                <a:cs typeface="Samsung SS Head Bold" pitchFamily="2" charset="0"/>
+              </a:rPr>
               <a:t>Цели и задачи</a:t>
             </a:r>
           </a:p>
@@ -5200,7 +5728,13 @@
           <a:lstStyle/>
           <a:p>
             <a:r>
-              <a:rPr lang="ru-RU" dirty="0"/>
+              <a:rPr lang="ru-RU" dirty="0">
+                <a:solidFill>
+                  <a:srgbClr val="4D4D4D"/>
+                </a:solidFill>
+                <a:latin typeface="Samsung SS Body Bold" pitchFamily="2" charset="0"/>
+                <a:cs typeface="Samsung SS Body Bold" pitchFamily="2" charset="0"/>
+              </a:rPr>
               <a:t>Цель</a:t>
             </a:r>
           </a:p>
@@ -5220,6 +5754,69 @@
           </p:cNvSpPr>
           <p:nvPr>
             <p:ph sz="half" idx="2"/>
+          </p:nvPr>
+        </p:nvSpPr>
+        <p:spPr>
+          <a:xfrm>
+            <a:off x="839788" y="3391691"/>
+            <a:ext cx="5157787" cy="2060819"/>
+          </a:xfrm>
+        </p:spPr>
+        <p:txBody>
+          <a:bodyPr>
+            <a:normAutofit/>
+          </a:bodyPr>
+          <a:lstStyle/>
+          <a:p>
+            <a:pPr marL="0" indent="0">
+              <a:buNone/>
+            </a:pPr>
+            <a:r>
+              <a:rPr lang="ru-RU" sz="2000" dirty="0">
+                <a:solidFill>
+                  <a:srgbClr val="333333"/>
+                </a:solidFill>
+                <a:latin typeface="Samsung SS Body Light" pitchFamily="2" charset="0"/>
+                <a:cs typeface="Samsung SS Body Light" pitchFamily="2" charset="0"/>
+              </a:rPr>
+              <a:t>Разработать прототип системы для автоматического обнаружения персональных данных</a:t>
+            </a:r>
+            <a:br>
+              <a:rPr lang="ru-RU" sz="2000" dirty="0">
+                <a:solidFill>
+                  <a:srgbClr val="333333"/>
+                </a:solidFill>
+                <a:latin typeface="Samsung SS Body Light" pitchFamily="2" charset="0"/>
+                <a:cs typeface="Samsung SS Body Light" pitchFamily="2" charset="0"/>
+              </a:rPr>
+            </a:br>
+            <a:r>
+              <a:rPr lang="ru-RU" sz="2000" dirty="0">
+                <a:solidFill>
+                  <a:srgbClr val="333333"/>
+                </a:solidFill>
+                <a:latin typeface="Samsung SS Body Light" pitchFamily="2" charset="0"/>
+                <a:cs typeface="Samsung SS Body Light" pitchFamily="2" charset="0"/>
+              </a:rPr>
+              <a:t>в неструктурированных файловых хранилищах и обеспечить универсальность решения для работы с разнородными данными</a:t>
+            </a:r>
+          </a:p>
+        </p:txBody>
+      </p:sp>
+      <p:sp>
+        <p:nvSpPr>
+          <p:cNvPr id="5" name="Текст 4">
+            <a:extLst>
+              <a:ext uri="{FF2B5EF4-FFF2-40B4-BE49-F238E27FC236}">
+                <a16:creationId xmlns:a16="http://schemas.microsoft.com/office/drawing/2014/main" id="{55A0ECBB-88FB-49EF-892E-AF21DA8C9C42}"/>
+              </a:ext>
+            </a:extLst>
+          </p:cNvPr>
+          <p:cNvSpPr>
+            <a:spLocks noGrp="1"/>
+          </p:cNvSpPr>
+          <p:nvPr>
+            <p:ph type="body" sz="quarter" idx="3"/>
           </p:nvPr>
         </p:nvSpPr>
         <p:spPr/>
@@ -5228,42 +5825,13 @@
           <a:lstStyle/>
           <a:p>
             <a:r>
-              <a:rPr lang="ru-RU" dirty="0"/>
-              <a:t>Разработать прототип системы для автоматического обнаружения персональных данных</a:t>
-            </a:r>
-            <a:br>
-              <a:rPr lang="ru-RU" dirty="0"/>
-            </a:br>
-            <a:r>
-              <a:rPr lang="ru-RU" dirty="0"/>
-              <a:t>в неструктурированных файловых хранилищах и обеспечить универсальность решения для работы с разнородными данными</a:t>
-            </a:r>
-          </a:p>
-        </p:txBody>
-      </p:sp>
-      <p:sp>
-        <p:nvSpPr>
-          <p:cNvPr id="5" name="Текст 4">
-            <a:extLst>
-              <a:ext uri="{FF2B5EF4-FFF2-40B4-BE49-F238E27FC236}">
-                <a16:creationId xmlns:a16="http://schemas.microsoft.com/office/drawing/2014/main" id="{55A0ECBB-88FB-49EF-892E-AF21DA8C9C42}"/>
-              </a:ext>
-            </a:extLst>
-          </p:cNvPr>
-          <p:cNvSpPr>
-            <a:spLocks noGrp="1"/>
-          </p:cNvSpPr>
-          <p:nvPr>
-            <p:ph type="body" sz="quarter" idx="3"/>
-          </p:nvPr>
-        </p:nvSpPr>
-        <p:spPr/>
-        <p:txBody>
-          <a:bodyPr/>
-          <a:lstStyle/>
-          <a:p>
-            <a:r>
-              <a:rPr lang="ru-RU" dirty="0"/>
+              <a:rPr lang="ru-RU" dirty="0">
+                <a:solidFill>
+                  <a:srgbClr val="333333"/>
+                </a:solidFill>
+                <a:latin typeface="Samsung SS Body Bold" pitchFamily="2" charset="0"/>
+                <a:cs typeface="Samsung SS Body Bold" pitchFamily="2" charset="0"/>
+              </a:rPr>
               <a:t>Задачи</a:t>
             </a:r>
           </a:p>
@@ -5287,8 +5855,8 @@
         </p:nvSpPr>
         <p:spPr bwMode="auto">
           <a:xfrm>
-            <a:off x="6172200" y="3331707"/>
-            <a:ext cx="5390835" cy="2031325"/>
+            <a:off x="6172200" y="2698551"/>
+            <a:ext cx="4962833" cy="3447098"/>
           </a:xfrm>
           <a:prstGeom prst="rect">
             <a:avLst/>
@@ -5348,17 +5916,45 @@
               </a:spcAft>
             </a:pPr>
             <a:r>
-              <a:rPr kumimoji="0" lang="ru-RU" altLang="ru-RU" sz="1800" b="0" i="0" u="none" strike="noStrike" cap="none" normalizeH="0" baseline="0" dirty="0">
+              <a:rPr kumimoji="0" lang="ru-RU" altLang="ru-RU" sz="2000" b="0" i="0" u="none" strike="noStrike" cap="none" normalizeH="0" baseline="0" dirty="0">
                 <a:ln>
                   <a:noFill/>
                 </a:ln>
                 <a:solidFill>
-                  <a:schemeClr val="tx1"/>
+                  <a:srgbClr val="333333"/>
                 </a:solidFill>
                 <a:effectLst/>
-                <a:latin typeface="Arial" panose="020B0604020202020204" pitchFamily="34" charset="0"/>
-              </a:rPr>
-              <a:t>Реализовать обход файловой системы </a:t>
+                <a:latin typeface="Samsung SS Body Light" pitchFamily="2" charset="0"/>
+                <a:cs typeface="Samsung SS Body Light" pitchFamily="2" charset="0"/>
+              </a:rPr>
+              <a:t>Реализовать обход </a:t>
+            </a:r>
+            <a:br>
+              <a:rPr kumimoji="0" lang="en-US" altLang="ru-RU" sz="2000" b="0" i="0" u="none" strike="noStrike" cap="none" normalizeH="0" baseline="0" dirty="0">
+                <a:ln>
+                  <a:noFill/>
+                </a:ln>
+                <a:solidFill>
+                  <a:srgbClr val="333333"/>
+                </a:solidFill>
+                <a:effectLst/>
+                <a:latin typeface="Samsung SS Body Light" pitchFamily="2" charset="0"/>
+                <a:cs typeface="Samsung SS Body Light" pitchFamily="2" charset="0"/>
+              </a:rPr>
+            </a:br>
+            <a:r>
+              <a:rPr kumimoji="0" lang="ru-RU" altLang="ru-RU" sz="2000" b="0" i="0" u="none" strike="noStrike" cap="none" normalizeH="0" baseline="0" dirty="0">
+                <a:ln>
+                  <a:noFill/>
+                </a:ln>
+                <a:solidFill>
+                  <a:srgbClr val="333333"/>
+                </a:solidFill>
+                <a:effectLst/>
+                <a:latin typeface="Samsung SS Body Light" pitchFamily="2" charset="0"/>
+                <a:cs typeface="Samsung SS Body Light" pitchFamily="2" charset="0"/>
+              </a:rPr>
+              <a:t>файловой системы </a:t>
             </a:r>
           </a:p>
           <a:p>
@@ -5374,17 +5970,45 @@
               </a:spcAft>
             </a:pPr>
             <a:r>
-              <a:rPr kumimoji="0" lang="ru-RU" altLang="ru-RU" sz="1800" b="0" i="0" u="none" strike="noStrike" cap="none" normalizeH="0" baseline="0" dirty="0">
+              <a:rPr kumimoji="0" lang="ru-RU" altLang="ru-RU" sz="2000" b="0" i="0" u="none" strike="noStrike" cap="none" normalizeH="0" baseline="0" dirty="0">
                 <a:ln>
                   <a:noFill/>
                 </a:ln>
                 <a:solidFill>
-                  <a:schemeClr val="tx1"/>
+                  <a:srgbClr val="333333"/>
                 </a:solidFill>
                 <a:effectLst/>
-                <a:latin typeface="Arial" panose="020B0604020202020204" pitchFamily="34" charset="0"/>
-              </a:rPr>
-              <a:t>Обработать файлы различных форматов </a:t>
+                <a:latin typeface="Samsung SS Body Light" pitchFamily="2" charset="0"/>
+                <a:cs typeface="Samsung SS Body Light" pitchFamily="2" charset="0"/>
+              </a:rPr>
+              <a:t>Обработать файлы различных </a:t>
+            </a:r>
+            <a:br>
+              <a:rPr kumimoji="0" lang="en-US" altLang="ru-RU" sz="2000" b="0" i="0" u="none" strike="noStrike" cap="none" normalizeH="0" baseline="0" dirty="0">
+                <a:ln>
+                  <a:noFill/>
+                </a:ln>
+                <a:solidFill>
+                  <a:srgbClr val="333333"/>
+                </a:solidFill>
+                <a:effectLst/>
+                <a:latin typeface="Samsung SS Body Light" pitchFamily="2" charset="0"/>
+                <a:cs typeface="Samsung SS Body Light" pitchFamily="2" charset="0"/>
+              </a:rPr>
+            </a:br>
+            <a:r>
+              <a:rPr kumimoji="0" lang="ru-RU" altLang="ru-RU" sz="2000" b="0" i="0" u="none" strike="noStrike" cap="none" normalizeH="0" baseline="0" dirty="0">
+                <a:ln>
+                  <a:noFill/>
+                </a:ln>
+                <a:solidFill>
+                  <a:srgbClr val="333333"/>
+                </a:solidFill>
+                <a:effectLst/>
+                <a:latin typeface="Samsung SS Body Light" pitchFamily="2" charset="0"/>
+                <a:cs typeface="Samsung SS Body Light" pitchFamily="2" charset="0"/>
+              </a:rPr>
+              <a:t>форматов </a:t>
             </a:r>
           </a:p>
           <a:p>
@@ -5400,17 +6024,45 @@
               </a:spcAft>
             </a:pPr>
             <a:r>
-              <a:rPr kumimoji="0" lang="ru-RU" altLang="ru-RU" sz="1800" b="0" i="0" u="none" strike="noStrike" cap="none" normalizeH="0" baseline="0" dirty="0">
+              <a:rPr kumimoji="0" lang="ru-RU" altLang="ru-RU" sz="2000" b="0" i="0" u="none" strike="noStrike" cap="none" normalizeH="0" baseline="0" dirty="0">
                 <a:ln>
                   <a:noFill/>
                 </a:ln>
                 <a:solidFill>
-                  <a:schemeClr val="tx1"/>
+                  <a:srgbClr val="333333"/>
                 </a:solidFill>
                 <a:effectLst/>
-                <a:latin typeface="Arial" panose="020B0604020202020204" pitchFamily="34" charset="0"/>
-              </a:rPr>
-              <a:t>Извлечь текст из документов и изображений </a:t>
+                <a:latin typeface="Samsung SS Body Light" pitchFamily="2" charset="0"/>
+                <a:cs typeface="Samsung SS Body Light" pitchFamily="2" charset="0"/>
+              </a:rPr>
+              <a:t>Извлечь текст из документов </a:t>
+            </a:r>
+            <a:br>
+              <a:rPr kumimoji="0" lang="en-US" altLang="ru-RU" sz="2000" b="0" i="0" u="none" strike="noStrike" cap="none" normalizeH="0" baseline="0" dirty="0">
+                <a:ln>
+                  <a:noFill/>
+                </a:ln>
+                <a:solidFill>
+                  <a:srgbClr val="333333"/>
+                </a:solidFill>
+                <a:effectLst/>
+                <a:latin typeface="Samsung SS Body Light" pitchFamily="2" charset="0"/>
+                <a:cs typeface="Samsung SS Body Light" pitchFamily="2" charset="0"/>
+              </a:rPr>
+            </a:br>
+            <a:r>
+              <a:rPr kumimoji="0" lang="ru-RU" altLang="ru-RU" sz="2000" b="0" i="0" u="none" strike="noStrike" cap="none" normalizeH="0" baseline="0" dirty="0">
+                <a:ln>
+                  <a:noFill/>
+                </a:ln>
+                <a:solidFill>
+                  <a:srgbClr val="333333"/>
+                </a:solidFill>
+                <a:effectLst/>
+                <a:latin typeface="Samsung SS Body Light" pitchFamily="2" charset="0"/>
+                <a:cs typeface="Samsung SS Body Light" pitchFamily="2" charset="0"/>
+              </a:rPr>
+              <a:t>и изображений </a:t>
             </a:r>
           </a:p>
           <a:p>
@@ -5426,40 +6078,43 @@
               </a:spcAft>
             </a:pPr>
             <a:r>
-              <a:rPr kumimoji="0" lang="ru-RU" altLang="ru-RU" sz="1800" b="0" i="0" u="none" strike="noStrike" cap="none" normalizeH="0" baseline="0" dirty="0">
+              <a:rPr kumimoji="0" lang="ru-RU" altLang="ru-RU" sz="2000" b="0" i="0" u="none" strike="noStrike" cap="none" normalizeH="0" baseline="0" dirty="0">
                 <a:ln>
                   <a:noFill/>
                 </a:ln>
                 <a:solidFill>
-                  <a:schemeClr val="tx1"/>
+                  <a:srgbClr val="333333"/>
                 </a:solidFill>
                 <a:effectLst/>
-                <a:latin typeface="Arial" panose="020B0604020202020204" pitchFamily="34" charset="0"/>
+                <a:latin typeface="Samsung SS Body Light" pitchFamily="2" charset="0"/>
+                <a:cs typeface="Samsung SS Body Light" pitchFamily="2" charset="0"/>
               </a:rPr>
               <a:t>Реализовать механизм обнаружения </a:t>
             </a:r>
             <a:br>
-              <a:rPr kumimoji="0" lang="ru-RU" altLang="ru-RU" sz="1800" b="0" i="0" u="none" strike="noStrike" cap="none" normalizeH="0" baseline="0" dirty="0">
+              <a:rPr kumimoji="0" lang="ru-RU" altLang="ru-RU" sz="2000" b="0" i="0" u="none" strike="noStrike" cap="none" normalizeH="0" baseline="0" dirty="0">
                 <a:ln>
                   <a:noFill/>
                 </a:ln>
                 <a:solidFill>
-                  <a:schemeClr val="tx1"/>
+                  <a:srgbClr val="333333"/>
                 </a:solidFill>
                 <a:effectLst/>
-                <a:latin typeface="Arial" panose="020B0604020202020204" pitchFamily="34" charset="0"/>
+                <a:latin typeface="Samsung SS Body Light" pitchFamily="2" charset="0"/>
+                <a:cs typeface="Samsung SS Body Light" pitchFamily="2" charset="0"/>
               </a:rPr>
             </a:br>
             <a:r>
-              <a:rPr kumimoji="0" lang="ru-RU" altLang="ru-RU" sz="1800" b="0" i="0" u="none" strike="noStrike" cap="none" normalizeH="0" baseline="0" dirty="0">
+              <a:rPr kumimoji="0" lang="ru-RU" altLang="ru-RU" sz="2000" b="0" i="0" u="none" strike="noStrike" cap="none" normalizeH="0" baseline="0" dirty="0">
                 <a:ln>
                   <a:noFill/>
                 </a:ln>
                 <a:solidFill>
-                  <a:schemeClr val="tx1"/>
+                  <a:srgbClr val="333333"/>
                 </a:solidFill>
                 <a:effectLst/>
-                <a:latin typeface="Arial" panose="020B0604020202020204" pitchFamily="34" charset="0"/>
+                <a:latin typeface="Samsung SS Body Light" pitchFamily="2" charset="0"/>
+                <a:cs typeface="Samsung SS Body Light" pitchFamily="2" charset="0"/>
               </a:rPr>
               <a:t>персональных данных </a:t>
             </a:r>
@@ -5477,17 +6132,45 @@
               </a:spcAft>
             </a:pPr>
             <a:r>
-              <a:rPr kumimoji="0" lang="ru-RU" altLang="ru-RU" sz="1800" b="0" i="0" u="none" strike="noStrike" cap="none" normalizeH="0" baseline="0" dirty="0">
+              <a:rPr kumimoji="0" lang="ru-RU" altLang="ru-RU" sz="2000" b="0" i="0" u="none" strike="noStrike" cap="none" normalizeH="0" baseline="0" dirty="0">
                 <a:ln>
                   <a:noFill/>
                 </a:ln>
                 <a:solidFill>
-                  <a:schemeClr val="tx1"/>
+                  <a:srgbClr val="333333"/>
                 </a:solidFill>
                 <a:effectLst/>
-                <a:latin typeface="Arial" panose="020B0604020202020204" pitchFamily="34" charset="0"/>
-              </a:rPr>
-              <a:t>Сформировать отчет по результатам анализа </a:t>
+                <a:latin typeface="Samsung SS Body Light" pitchFamily="2" charset="0"/>
+                <a:cs typeface="Samsung SS Body Light" pitchFamily="2" charset="0"/>
+              </a:rPr>
+              <a:t>Сформировать отчет </a:t>
+            </a:r>
+            <a:br>
+              <a:rPr kumimoji="0" lang="en-US" altLang="ru-RU" sz="2000" b="0" i="0" u="none" strike="noStrike" cap="none" normalizeH="0" baseline="0" dirty="0">
+                <a:ln>
+                  <a:noFill/>
+                </a:ln>
+                <a:solidFill>
+                  <a:srgbClr val="333333"/>
+                </a:solidFill>
+                <a:effectLst/>
+                <a:latin typeface="Samsung SS Body Light" pitchFamily="2" charset="0"/>
+                <a:cs typeface="Samsung SS Body Light" pitchFamily="2" charset="0"/>
+              </a:rPr>
+            </a:br>
+            <a:r>
+              <a:rPr kumimoji="0" lang="ru-RU" altLang="ru-RU" sz="2000" b="0" i="0" u="none" strike="noStrike" cap="none" normalizeH="0" baseline="0" dirty="0">
+                <a:ln>
+                  <a:noFill/>
+                </a:ln>
+                <a:solidFill>
+                  <a:srgbClr val="333333"/>
+                </a:solidFill>
+                <a:effectLst/>
+                <a:latin typeface="Samsung SS Body Light" pitchFamily="2" charset="0"/>
+                <a:cs typeface="Samsung SS Body Light" pitchFamily="2" charset="0"/>
+              </a:rPr>
+              <a:t>по результатам анализа </a:t>
             </a:r>
           </a:p>
           <a:p>
@@ -5507,7 +6190,7 @@
                 <a:noFill/>
               </a:ln>
               <a:solidFill>
-                <a:schemeClr val="tx1"/>
+                <a:srgbClr val="333333"/>
               </a:solidFill>
               <a:effectLst/>
               <a:latin typeface="Arial" panose="020B0604020202020204" pitchFamily="34" charset="0"/>
@@ -5563,8 +6246,8 @@
         </p:nvSpPr>
         <p:spPr>
           <a:xfrm>
-            <a:off x="839787" y="556278"/>
-            <a:ext cx="3932237" cy="1600200"/>
+            <a:off x="1978268" y="2101362"/>
+            <a:ext cx="2222255" cy="556278"/>
           </a:xfrm>
         </p:spPr>
         <p:txBody>
@@ -5573,7 +6256,13 @@
           <a:p>
             <a:pPr algn="ctr"/>
             <a:r>
-              <a:rPr lang="ru-RU" dirty="0"/>
+              <a:rPr lang="ru-RU" dirty="0">
+                <a:solidFill>
+                  <a:srgbClr val="333333"/>
+                </a:solidFill>
+                <a:latin typeface="Samsung SS Head Bold" pitchFamily="2" charset="0"/>
+                <a:cs typeface="Samsung SS Head Bold" pitchFamily="2" charset="0"/>
+              </a:rPr>
               <a:t>Гипотезы</a:t>
             </a:r>
           </a:p>
@@ -5595,33 +6284,70 @@
             <p:ph idx="1"/>
           </p:nvPr>
         </p:nvSpPr>
-        <p:spPr/>
-        <p:txBody>
-          <a:bodyPr/>
+        <p:spPr>
+          <a:xfrm>
+            <a:off x="5200773" y="797046"/>
+            <a:ext cx="6172200" cy="5263907"/>
+          </a:xfrm>
+        </p:spPr>
+        <p:txBody>
+          <a:bodyPr>
+            <a:normAutofit/>
+          </a:bodyPr>
           <a:lstStyle/>
           <a:p>
             <a:r>
-              <a:rPr lang="ru-RU" dirty="0"/>
+              <a:rPr lang="ru-RU" dirty="0">
+                <a:solidFill>
+                  <a:srgbClr val="333333"/>
+                </a:solidFill>
+                <a:latin typeface="Samsung SS Body Light" pitchFamily="2" charset="0"/>
+                <a:cs typeface="Samsung SS Body Light" pitchFamily="2" charset="0"/>
+              </a:rPr>
               <a:t>Персональные данные можно обнаруживать автоматически через извлечение текста и шаблонный поиск</a:t>
             </a:r>
           </a:p>
           <a:p>
             <a:r>
-              <a:rPr lang="ru-RU" dirty="0"/>
+              <a:rPr lang="ru-RU" dirty="0">
+                <a:solidFill>
+                  <a:srgbClr val="333333"/>
+                </a:solidFill>
+                <a:latin typeface="Samsung SS Body Light" pitchFamily="2" charset="0"/>
+                <a:cs typeface="Samsung SS Body Light" pitchFamily="2" charset="0"/>
+              </a:rPr>
               <a:t>OCR критичен, так как значительная часть данных хранится в виде сканов</a:t>
             </a:r>
           </a:p>
           <a:p>
             <a:r>
-              <a:rPr lang="ru-RU" dirty="0"/>
+              <a:rPr lang="ru-RU" dirty="0">
+                <a:solidFill>
+                  <a:srgbClr val="333333"/>
+                </a:solidFill>
+                <a:latin typeface="Samsung SS Body Light" pitchFamily="2" charset="0"/>
+                <a:cs typeface="Samsung SS Body Light" pitchFamily="2" charset="0"/>
+              </a:rPr>
               <a:t>Даже простые методы (</a:t>
             </a:r>
             <a:r>
-              <a:rPr lang="ru-RU" dirty="0" err="1"/>
+              <a:rPr lang="ru-RU" dirty="0" err="1">
+                <a:solidFill>
+                  <a:srgbClr val="333333"/>
+                </a:solidFill>
+                <a:latin typeface="Samsung SS Body Light" pitchFamily="2" charset="0"/>
+                <a:cs typeface="Samsung SS Body Light" pitchFamily="2" charset="0"/>
+              </a:rPr>
               <a:t>regex</a:t>
             </a:r>
             <a:r>
-              <a:rPr lang="ru-RU" dirty="0"/>
+              <a:rPr lang="ru-RU" dirty="0">
+                <a:solidFill>
+                  <a:srgbClr val="333333"/>
+                </a:solidFill>
+                <a:latin typeface="Samsung SS Body Light" pitchFamily="2" charset="0"/>
+                <a:cs typeface="Samsung SS Body Light" pitchFamily="2" charset="0"/>
+              </a:rPr>
               <a:t> + OCR) дают практическую ценность</a:t>
             </a:r>
           </a:p>
@@ -5656,7 +6382,7 @@
         </p:blipFill>
         <p:spPr bwMode="auto">
           <a:xfrm>
-            <a:off x="1317808" y="3424237"/>
+            <a:off x="1601297" y="3270737"/>
             <a:ext cx="2976196" cy="2077385"/>
           </a:xfrm>
           <a:prstGeom prst="rect">
@@ -5732,13 +6458,31 @@
           <a:p>
             <a:pPr algn="ctr"/>
             <a:r>
-              <a:rPr lang="ru-RU" b="1" dirty="0"/>
+              <a:rPr lang="ru-RU" b="1" dirty="0">
+                <a:solidFill>
+                  <a:srgbClr val="333333"/>
+                </a:solidFill>
+                <a:latin typeface="Samsung SS Head Bold" pitchFamily="2" charset="0"/>
+                <a:cs typeface="Samsung SS Head Bold" pitchFamily="2" charset="0"/>
+              </a:rPr>
               <a:t>Поддерживаемые форматы</a:t>
             </a:r>
             <a:br>
-              <a:rPr lang="ru-RU" b="1" dirty="0"/>
+              <a:rPr lang="ru-RU" b="1" dirty="0">
+                <a:solidFill>
+                  <a:srgbClr val="333333"/>
+                </a:solidFill>
+                <a:latin typeface="Samsung SS Head Bold" pitchFamily="2" charset="0"/>
+                <a:cs typeface="Samsung SS Head Bold" pitchFamily="2" charset="0"/>
+              </a:rPr>
             </a:br>
-            <a:endParaRPr lang="ru-RU" dirty="0"/>
+            <a:endParaRPr lang="ru-RU" dirty="0">
+              <a:solidFill>
+                <a:srgbClr val="333333"/>
+              </a:solidFill>
+              <a:latin typeface="Samsung SS Head Bold" pitchFamily="2" charset="0"/>
+              <a:cs typeface="Samsung SS Head Bold" pitchFamily="2" charset="0"/>
+            </a:endParaRPr>
           </a:p>
         </p:txBody>
       </p:sp>
@@ -5768,40 +6512,88 @@
           <a:bodyPr/>
           <a:lstStyle/>
           <a:p>
+            <a:pPr marL="0" indent="0" algn="ctr">
+              <a:buNone/>
+            </a:pPr>
+            <a:r>
+              <a:rPr lang="ru-RU" b="1" dirty="0">
+                <a:solidFill>
+                  <a:srgbClr val="333333"/>
+                </a:solidFill>
+                <a:latin typeface="Samsung SS Body Bold" pitchFamily="2" charset="0"/>
+                <a:cs typeface="Samsung SS Body Bold" pitchFamily="2" charset="0"/>
+              </a:rPr>
+              <a:t>Типы обрабатываемых файлов</a:t>
+            </a:r>
+            <a:endParaRPr lang="en-US" b="1" dirty="0">
+              <a:solidFill>
+                <a:srgbClr val="333333"/>
+              </a:solidFill>
+              <a:latin typeface="Samsung SS Body Bold" pitchFamily="2" charset="0"/>
+              <a:cs typeface="Samsung SS Body Bold" pitchFamily="2" charset="0"/>
+            </a:endParaRPr>
+          </a:p>
+          <a:p>
             <a:pPr marL="0" indent="0">
               <a:buNone/>
             </a:pPr>
-            <a:r>
-              <a:rPr lang="ru-RU" b="1" dirty="0"/>
-              <a:t>Типы обрабатываемых файлов</a:t>
-            </a:r>
-            <a:endParaRPr lang="ru-RU" dirty="0"/>
-          </a:p>
-          <a:p>
-            <a:r>
-              <a:rPr lang="ru-RU" dirty="0"/>
+            <a:endParaRPr lang="ru-RU" dirty="0">
+              <a:solidFill>
+                <a:srgbClr val="333333"/>
+              </a:solidFill>
+              <a:latin typeface="Samsung SS Body Bold" pitchFamily="2" charset="0"/>
+              <a:cs typeface="Samsung SS Body Bold" pitchFamily="2" charset="0"/>
+            </a:endParaRPr>
+          </a:p>
+          <a:p>
+            <a:r>
+              <a:rPr lang="ru-RU" dirty="0">
+                <a:solidFill>
+                  <a:srgbClr val="333333"/>
+                </a:solidFill>
+              </a:rPr>
               <a:t>Документы: PDF, DOCX, </a:t>
             </a:r>
             <a:r>
-              <a:rPr lang="en-US" dirty="0"/>
+              <a:rPr lang="en-US" dirty="0">
+                <a:solidFill>
+                  <a:srgbClr val="333333"/>
+                </a:solidFill>
+              </a:rPr>
               <a:t>CSV</a:t>
             </a:r>
-            <a:endParaRPr lang="ru-RU" dirty="0"/>
-          </a:p>
-          <a:p>
-            <a:r>
-              <a:rPr lang="ru-RU" dirty="0"/>
+            <a:endParaRPr lang="ru-RU" dirty="0">
+              <a:solidFill>
+                <a:srgbClr val="333333"/>
+              </a:solidFill>
+            </a:endParaRPr>
+          </a:p>
+          <a:p>
+            <a:r>
+              <a:rPr lang="ru-RU" dirty="0">
+                <a:solidFill>
+                  <a:srgbClr val="333333"/>
+                </a:solidFill>
+              </a:rPr>
               <a:t>Изображения: JPG, PNG, TIFF </a:t>
             </a:r>
           </a:p>
           <a:p>
             <a:r>
-              <a:rPr lang="ru-RU" dirty="0"/>
+              <a:rPr lang="ru-RU" dirty="0">
+                <a:solidFill>
+                  <a:srgbClr val="333333"/>
+                </a:solidFill>
+              </a:rPr>
               <a:t>Сканированные документы (через OCR)</a:t>
             </a:r>
           </a:p>
           <a:p>
-            <a:endParaRPr lang="ru-RU" dirty="0"/>
+            <a:endParaRPr lang="ru-RU" dirty="0">
+              <a:solidFill>
+                <a:srgbClr val="333333"/>
+              </a:solidFill>
+            </a:endParaRPr>
           </a:p>
         </p:txBody>
       </p:sp>
@@ -6053,16 +6845,40 @@
           <a:p>
             <a:pPr algn="ctr"/>
             <a:br>
-              <a:rPr lang="ru-RU" b="1" dirty="0"/>
+              <a:rPr lang="ru-RU" b="1" dirty="0">
+                <a:solidFill>
+                  <a:srgbClr val="333333"/>
+                </a:solidFill>
+                <a:latin typeface="Samsung SS Head Bold" pitchFamily="2" charset="0"/>
+                <a:cs typeface="Samsung SS Head Bold" pitchFamily="2" charset="0"/>
+              </a:rPr>
             </a:br>
             <a:r>
-              <a:rPr lang="ru-RU" b="1" dirty="0"/>
+              <a:rPr lang="ru-RU" b="1" dirty="0">
+                <a:solidFill>
+                  <a:srgbClr val="333333"/>
+                </a:solidFill>
+                <a:latin typeface="Samsung SS Head Bold" pitchFamily="2" charset="0"/>
+                <a:cs typeface="Samsung SS Head Bold" pitchFamily="2" charset="0"/>
+              </a:rPr>
               <a:t>Методы извлечения текста</a:t>
             </a:r>
             <a:br>
-              <a:rPr lang="ru-RU" b="1" dirty="0"/>
+              <a:rPr lang="ru-RU" b="1" dirty="0">
+                <a:solidFill>
+                  <a:srgbClr val="333333"/>
+                </a:solidFill>
+                <a:latin typeface="Samsung SS Head Bold" pitchFamily="2" charset="0"/>
+                <a:cs typeface="Samsung SS Head Bold" pitchFamily="2" charset="0"/>
+              </a:rPr>
             </a:br>
-            <a:endParaRPr lang="ru-RU" dirty="0"/>
+            <a:endParaRPr lang="ru-RU" dirty="0">
+              <a:solidFill>
+                <a:srgbClr val="333333"/>
+              </a:solidFill>
+              <a:latin typeface="Samsung SS Head Bold" pitchFamily="2" charset="0"/>
+              <a:cs typeface="Samsung SS Head Bold" pitchFamily="2" charset="0"/>
+            </a:endParaRPr>
           </a:p>
         </p:txBody>
       </p:sp>
@@ -6094,78 +6910,153 @@
           </a:bodyPr>
           <a:lstStyle/>
           <a:p>
-            <a:r>
-              <a:rPr lang="ru-RU" dirty="0"/>
+            <a:pPr algn="ctr"/>
+            <a:r>
+              <a:rPr lang="ru-RU" dirty="0">
+                <a:solidFill>
+                  <a:srgbClr val="333333"/>
+                </a:solidFill>
+              </a:rPr>
               <a:t>PDF → встроенный текст</a:t>
             </a:r>
           </a:p>
           <a:p>
-            <a:r>
-              <a:rPr lang="ru-RU" dirty="0"/>
+            <a:pPr algn="ctr"/>
+            <a:r>
+              <a:rPr lang="ru-RU" dirty="0">
+                <a:solidFill>
+                  <a:srgbClr val="333333"/>
+                </a:solidFill>
+              </a:rPr>
               <a:t>DOCX / </a:t>
             </a:r>
             <a:r>
-              <a:rPr lang="ru-RU" dirty="0" err="1"/>
+              <a:rPr lang="ru-RU" dirty="0" err="1">
+                <a:solidFill>
+                  <a:srgbClr val="333333"/>
+                </a:solidFill>
+              </a:rPr>
               <a:t>Excel</a:t>
             </a:r>
             <a:r>
-              <a:rPr lang="ru-RU" dirty="0"/>
+              <a:rPr lang="ru-RU" dirty="0">
+                <a:solidFill>
+                  <a:srgbClr val="333333"/>
+                </a:solidFill>
+              </a:rPr>
               <a:t> → </a:t>
             </a:r>
             <a:r>
-              <a:rPr lang="ru-RU" dirty="0" err="1"/>
+              <a:rPr lang="ru-RU" dirty="0" err="1">
+                <a:solidFill>
+                  <a:srgbClr val="333333"/>
+                </a:solidFill>
+              </a:rPr>
               <a:t>парсинг</a:t>
             </a:r>
             <a:r>
-              <a:rPr lang="ru-RU" dirty="0"/>
+              <a:rPr lang="ru-RU" dirty="0">
+                <a:solidFill>
+                  <a:srgbClr val="333333"/>
+                </a:solidFill>
+              </a:rPr>
               <a:t> структуры</a:t>
             </a:r>
           </a:p>
           <a:p>
-            <a:endParaRPr lang="ru-RU" dirty="0"/>
-          </a:p>
-          <a:p>
-            <a:r>
-              <a:rPr lang="ru-RU" dirty="0"/>
+            <a:pPr algn="ctr"/>
+            <a:endParaRPr lang="ru-RU" dirty="0">
+              <a:solidFill>
+                <a:srgbClr val="333333"/>
+              </a:solidFill>
+            </a:endParaRPr>
+          </a:p>
+          <a:p>
+            <a:pPr algn="ctr"/>
+            <a:r>
+              <a:rPr lang="ru-RU" dirty="0">
+                <a:solidFill>
+                  <a:srgbClr val="333333"/>
+                </a:solidFill>
+              </a:rPr>
               <a:t>Изображения → OCR (</a:t>
             </a:r>
             <a:r>
-              <a:rPr lang="ru-RU" dirty="0" err="1"/>
+              <a:rPr lang="ru-RU" dirty="0" err="1">
+                <a:solidFill>
+                  <a:srgbClr val="333333"/>
+                </a:solidFill>
+              </a:rPr>
               <a:t>Tesseract</a:t>
             </a:r>
             <a:r>
-              <a:rPr lang="ru-RU" dirty="0"/>
+              <a:rPr lang="ru-RU" dirty="0">
+                <a:solidFill>
+                  <a:srgbClr val="333333"/>
+                </a:solidFill>
+              </a:rPr>
               <a:t>)</a:t>
             </a:r>
           </a:p>
           <a:p>
-            <a:r>
-              <a:rPr lang="ru-RU" dirty="0"/>
+            <a:pPr algn="ctr"/>
+            <a:r>
+              <a:rPr lang="ru-RU" dirty="0">
+                <a:solidFill>
+                  <a:srgbClr val="333333"/>
+                </a:solidFill>
+              </a:rPr>
               <a:t>несколько попыток OCR</a:t>
             </a:r>
           </a:p>
           <a:p>
-            <a:endParaRPr lang="ru-RU" dirty="0"/>
-          </a:p>
-          <a:p>
-            <a:r>
-              <a:rPr lang="ru-RU" dirty="0"/>
+            <a:pPr algn="ctr"/>
+            <a:endParaRPr lang="ru-RU" dirty="0">
+              <a:solidFill>
+                <a:srgbClr val="333333"/>
+              </a:solidFill>
+            </a:endParaRPr>
+          </a:p>
+          <a:p>
+            <a:pPr algn="ctr"/>
+            <a:r>
+              <a:rPr lang="ru-RU" dirty="0">
+                <a:solidFill>
+                  <a:srgbClr val="333333"/>
+                </a:solidFill>
+              </a:rPr>
               <a:t>улучшение качества изображения (</a:t>
             </a:r>
             <a:r>
-              <a:rPr lang="ru-RU" dirty="0" err="1"/>
+              <a:rPr lang="ru-RU" dirty="0" err="1">
+                <a:solidFill>
+                  <a:srgbClr val="333333"/>
+                </a:solidFill>
+              </a:rPr>
               <a:t>contrast</a:t>
             </a:r>
             <a:r>
-              <a:rPr lang="ru-RU" dirty="0"/>
+              <a:rPr lang="ru-RU" dirty="0">
+                <a:solidFill>
+                  <a:srgbClr val="333333"/>
+                </a:solidFill>
+              </a:rPr>
               <a:t>, </a:t>
             </a:r>
             <a:r>
-              <a:rPr lang="ru-RU" dirty="0" err="1"/>
+              <a:rPr lang="ru-RU" dirty="0" err="1">
+                <a:solidFill>
+                  <a:srgbClr val="333333"/>
+                </a:solidFill>
+              </a:rPr>
               <a:t>threshold</a:t>
             </a:r>
             <a:r>
-              <a:rPr lang="ru-RU" dirty="0"/>
+              <a:rPr lang="ru-RU" dirty="0">
+                <a:solidFill>
+                  <a:srgbClr val="333333"/>
+                </a:solidFill>
+              </a:rPr>
               <a:t>)</a:t>
             </a:r>
           </a:p>
@@ -6257,8 +7148,8 @@
         </p:nvSpPr>
         <p:spPr>
           <a:xfrm>
-            <a:off x="8779020" y="4668582"/>
-            <a:ext cx="2459648" cy="923330"/>
+            <a:off x="8562060" y="4668582"/>
+            <a:ext cx="2715616" cy="923330"/>
           </a:xfrm>
           <a:prstGeom prst="rect">
             <a:avLst/>
@@ -6273,21 +7164,33 @@
           <a:p>
             <a:pPr algn="ctr"/>
             <a:r>
-              <a:rPr lang="ru-RU" dirty="0" err="1"/>
+              <a:rPr lang="ru-RU" dirty="0" err="1">
+                <a:latin typeface="Samsung SS Body Light" pitchFamily="2" charset="0"/>
+                <a:cs typeface="Samsung SS Body Light" pitchFamily="2" charset="0"/>
+              </a:rPr>
               <a:t>Улыбаися</a:t>
             </a:r>
             <a:r>
-              <a:rPr lang="ru-RU" dirty="0"/>
+              <a:rPr lang="ru-RU" dirty="0">
+                <a:latin typeface="Samsung SS Body Light" pitchFamily="2" charset="0"/>
+                <a:cs typeface="Samsung SS Body Light" pitchFamily="2" charset="0"/>
+              </a:rPr>
               <a:t> чаше</a:t>
             </a:r>
           </a:p>
           <a:p>
-            <a:endParaRPr lang="ru-RU" dirty="0"/>
+            <a:endParaRPr lang="ru-RU" dirty="0">
+              <a:latin typeface="Samsung SS Body Light" pitchFamily="2" charset="0"/>
+              <a:cs typeface="Samsung SS Body Light" pitchFamily="2" charset="0"/>
+            </a:endParaRPr>
           </a:p>
           <a:p>
             <a:pPr algn="ctr"/>
             <a:r>
-              <a:rPr lang="ru-RU" dirty="0"/>
+              <a:rPr lang="ru-RU" dirty="0">
+                <a:latin typeface="Samsung SS Body Light" pitchFamily="2" charset="0"/>
+                <a:cs typeface="Samsung SS Body Light" pitchFamily="2" charset="0"/>
+              </a:rPr>
               <a:t>И чаша улыбнется тебе</a:t>
             </a:r>
           </a:p>
@@ -6351,13 +7254,31 @@
           <a:p>
             <a:pPr algn="ctr"/>
             <a:r>
-              <a:rPr lang="ru-RU" b="1" dirty="0"/>
+              <a:rPr lang="ru-RU" b="1" dirty="0">
+                <a:solidFill>
+                  <a:srgbClr val="333333"/>
+                </a:solidFill>
+                <a:latin typeface="Samsung SS Head Bold" pitchFamily="2" charset="0"/>
+                <a:cs typeface="Samsung SS Head Bold" pitchFamily="2" charset="0"/>
+              </a:rPr>
               <a:t>Повышение качества OCR</a:t>
             </a:r>
             <a:br>
-              <a:rPr lang="ru-RU" dirty="0"/>
+              <a:rPr lang="ru-RU" dirty="0">
+                <a:solidFill>
+                  <a:srgbClr val="333333"/>
+                </a:solidFill>
+                <a:latin typeface="Samsung SS Head Bold" pitchFamily="2" charset="0"/>
+                <a:cs typeface="Samsung SS Head Bold" pitchFamily="2" charset="0"/>
+              </a:rPr>
             </a:br>
-            <a:endParaRPr lang="ru-RU" dirty="0"/>
+            <a:endParaRPr lang="ru-RU" dirty="0">
+              <a:solidFill>
+                <a:srgbClr val="333333"/>
+              </a:solidFill>
+              <a:latin typeface="Samsung SS Head Bold" pitchFamily="2" charset="0"/>
+              <a:cs typeface="Samsung SS Head Bold" pitchFamily="2" charset="0"/>
+            </a:endParaRPr>
           </a:p>
         </p:txBody>
       </p:sp>
@@ -6379,90 +7300,169 @@
         </p:nvSpPr>
         <p:spPr>
           <a:xfrm>
-            <a:off x="836611" y="1342901"/>
-            <a:ext cx="10909911" cy="2552091"/>
+            <a:off x="526073" y="1591201"/>
+            <a:ext cx="11139853" cy="1954214"/>
           </a:xfrm>
         </p:spPr>
         <p:txBody>
           <a:bodyPr numCol="3">
-            <a:normAutofit/>
+            <a:normAutofit fontScale="85000" lnSpcReduction="10000"/>
           </a:bodyPr>
           <a:lstStyle/>
           <a:p>
-            <a:pPr marL="0" indent="0">
+            <a:pPr marL="0" indent="0" algn="ctr">
               <a:buNone/>
             </a:pPr>
             <a:r>
-              <a:rPr lang="en-US" dirty="0"/>
+              <a:rPr lang="en-US" dirty="0">
+                <a:solidFill>
+                  <a:srgbClr val="5F5F5F"/>
+                </a:solidFill>
+                <a:latin typeface="Samsung SS Body Light" pitchFamily="2" charset="0"/>
+                <a:cs typeface="Samsung SS Body Light" pitchFamily="2" charset="0"/>
+              </a:rPr>
               <a:t>1)</a:t>
             </a:r>
             <a:r>
-              <a:rPr lang="ru-RU" dirty="0"/>
+              <a:rPr lang="ru-RU" dirty="0">
+                <a:solidFill>
+                  <a:srgbClr val="5F5F5F"/>
+                </a:solidFill>
+                <a:latin typeface="Samsung SS Body Light" pitchFamily="2" charset="0"/>
+                <a:cs typeface="Samsung SS Body Light" pitchFamily="2" charset="0"/>
+              </a:rPr>
               <a:t> Предобработка изображений: </a:t>
             </a:r>
           </a:p>
           <a:p>
-            <a:pPr lvl="1"/>
-            <a:r>
-              <a:rPr lang="ru-RU" dirty="0"/>
+            <a:pPr lvl="1" algn="ctr"/>
+            <a:r>
+              <a:rPr lang="ru-RU" dirty="0">
+                <a:solidFill>
+                  <a:srgbClr val="5F5F5F"/>
+                </a:solidFill>
+                <a:latin typeface="Samsung SS Body Light" pitchFamily="2" charset="0"/>
+                <a:cs typeface="Samsung SS Body Light" pitchFamily="2" charset="0"/>
+              </a:rPr>
               <a:t>повышение контраста </a:t>
             </a:r>
           </a:p>
           <a:p>
-            <a:pPr lvl="1"/>
-            <a:r>
-              <a:rPr lang="ru-RU" dirty="0"/>
+            <a:pPr lvl="1" algn="ctr"/>
+            <a:r>
+              <a:rPr lang="ru-RU" dirty="0">
+                <a:solidFill>
+                  <a:srgbClr val="5F5F5F"/>
+                </a:solidFill>
+                <a:latin typeface="Samsung SS Body Light" pitchFamily="2" charset="0"/>
+                <a:cs typeface="Samsung SS Body Light" pitchFamily="2" charset="0"/>
+              </a:rPr>
               <a:t>масштабирование </a:t>
             </a:r>
-          </a:p>
-          <a:p>
-            <a:pPr marL="0" indent="0">
+            <a:endParaRPr lang="en-US" dirty="0">
+              <a:solidFill>
+                <a:srgbClr val="5F5F5F"/>
+              </a:solidFill>
+              <a:latin typeface="Samsung SS Body Light" pitchFamily="2" charset="0"/>
+              <a:cs typeface="Samsung SS Body Light" pitchFamily="2" charset="0"/>
+            </a:endParaRPr>
+          </a:p>
+          <a:p>
+            <a:pPr marL="0" indent="0" algn="ctr">
               <a:buNone/>
             </a:pPr>
             <a:r>
-              <a:rPr lang="ru-RU" dirty="0"/>
+              <a:rPr lang="ru-RU" dirty="0">
+                <a:solidFill>
+                  <a:srgbClr val="5F5F5F"/>
+                </a:solidFill>
+                <a:latin typeface="Samsung SS Body Light" pitchFamily="2" charset="0"/>
+                <a:cs typeface="Samsung SS Body Light" pitchFamily="2" charset="0"/>
+              </a:rPr>
               <a:t>2) несколько режимов распознавания (PSM) </a:t>
             </a:r>
           </a:p>
           <a:p>
-            <a:pPr marL="0" indent="0">
+            <a:pPr marL="0" indent="0" algn="ctr">
               <a:buNone/>
             </a:pPr>
-            <a:endParaRPr lang="ru-RU" dirty="0"/>
-          </a:p>
-          <a:p>
-            <a:pPr marL="0" indent="0">
+            <a:endParaRPr lang="ru-RU" dirty="0">
+              <a:solidFill>
+                <a:srgbClr val="5F5F5F"/>
+              </a:solidFill>
+              <a:latin typeface="Samsung SS Body Light" pitchFamily="2" charset="0"/>
+              <a:cs typeface="Samsung SS Body Light" pitchFamily="2" charset="0"/>
+            </a:endParaRPr>
+          </a:p>
+          <a:p>
+            <a:pPr marL="0" indent="0" algn="ctr">
               <a:buNone/>
             </a:pPr>
             <a:r>
-              <a:rPr lang="ru-RU" dirty="0"/>
+              <a:rPr lang="ru-RU" dirty="0">
+                <a:solidFill>
+                  <a:srgbClr val="5F5F5F"/>
+                </a:solidFill>
+                <a:latin typeface="Samsung SS Body Light" pitchFamily="2" charset="0"/>
+                <a:cs typeface="Samsung SS Body Light" pitchFamily="2" charset="0"/>
+              </a:rPr>
               <a:t>3) </a:t>
             </a:r>
             <a:r>
-              <a:rPr lang="ru-RU" dirty="0" err="1"/>
+              <a:rPr lang="ru-RU" dirty="0" err="1">
+                <a:solidFill>
+                  <a:srgbClr val="5F5F5F"/>
+                </a:solidFill>
+                <a:latin typeface="Samsung SS Body Light" pitchFamily="2" charset="0"/>
+                <a:cs typeface="Samsung SS Body Light" pitchFamily="2" charset="0"/>
+              </a:rPr>
               <a:t>fallback</a:t>
             </a:r>
             <a:r>
-              <a:rPr lang="ru-RU" dirty="0"/>
+              <a:rPr lang="ru-RU" dirty="0">
+                <a:solidFill>
+                  <a:srgbClr val="5F5F5F"/>
+                </a:solidFill>
+                <a:latin typeface="Samsung SS Body Light" pitchFamily="2" charset="0"/>
+                <a:cs typeface="Samsung SS Body Light" pitchFamily="2" charset="0"/>
+              </a:rPr>
               <a:t> стратегии: </a:t>
             </a:r>
           </a:p>
           <a:p>
-            <a:pPr lvl="1"/>
-            <a:r>
-              <a:rPr lang="ru-RU" dirty="0"/>
+            <a:pPr lvl="1" algn="ctr"/>
+            <a:r>
+              <a:rPr lang="ru-RU" dirty="0">
+                <a:solidFill>
+                  <a:srgbClr val="5F5F5F"/>
+                </a:solidFill>
+                <a:latin typeface="Samsung SS Body Light" pitchFamily="2" charset="0"/>
+                <a:cs typeface="Samsung SS Body Light" pitchFamily="2" charset="0"/>
+              </a:rPr>
               <a:t>обычный OCR </a:t>
             </a:r>
           </a:p>
           <a:p>
-            <a:pPr lvl="1"/>
-            <a:r>
-              <a:rPr lang="ru-RU" dirty="0"/>
+            <a:pPr lvl="1" algn="ctr"/>
+            <a:r>
+              <a:rPr lang="ru-RU" dirty="0">
+                <a:solidFill>
+                  <a:srgbClr val="5F5F5F"/>
+                </a:solidFill>
+                <a:latin typeface="Samsung SS Body Light" pitchFamily="2" charset="0"/>
+                <a:cs typeface="Samsung SS Body Light" pitchFamily="2" charset="0"/>
+              </a:rPr>
               <a:t>только цифры (для номеров)</a:t>
             </a:r>
           </a:p>
           <a:p>
-            <a:endParaRPr lang="ru-RU" dirty="0"/>
+            <a:endParaRPr lang="ru-RU" dirty="0">
+              <a:solidFill>
+                <a:srgbClr val="5F5F5F"/>
+              </a:solidFill>
+              <a:latin typeface="Samsung SS Body Light" pitchFamily="2" charset="0"/>
+              <a:cs typeface="Samsung SS Body Light" pitchFamily="2" charset="0"/>
+            </a:endParaRPr>
           </a:p>
         </p:txBody>
       </p:sp>
@@ -6494,7 +7494,7 @@
         </p:blipFill>
         <p:spPr>
           <a:xfrm>
-            <a:off x="836612" y="3779714"/>
+            <a:off x="1105948" y="3709375"/>
             <a:ext cx="2478272" cy="2478272"/>
           </a:xfrm>
           <a:prstGeom prst="rect">
@@ -6530,7 +7530,7 @@
         </p:blipFill>
         <p:spPr>
           <a:xfrm rot="10800000">
-            <a:off x="3855639" y="4216237"/>
+            <a:off x="4124975" y="4145898"/>
             <a:ext cx="4211388" cy="1828020"/>
           </a:xfrm>
           <a:prstGeom prst="rect">
@@ -6566,7 +7566,7 @@
         </p:blipFill>
         <p:spPr>
           <a:xfrm>
-            <a:off x="8607781" y="3779714"/>
+            <a:off x="8877117" y="3709375"/>
             <a:ext cx="2478272" cy="2478272"/>
           </a:xfrm>
           <a:prstGeom prst="rect">
@@ -6632,21 +7632,51 @@
           <a:p>
             <a:pPr algn="ctr"/>
             <a:r>
-              <a:rPr lang="ru-RU" b="1" dirty="0" err="1"/>
+              <a:rPr lang="ru-RU" b="1" dirty="0" err="1">
+                <a:solidFill>
+                  <a:srgbClr val="1C1C1C"/>
+                </a:solidFill>
+                <a:latin typeface="Samsung SS Head Bold" pitchFamily="2" charset="0"/>
+                <a:cs typeface="Samsung SS Head Bold" pitchFamily="2" charset="0"/>
+              </a:rPr>
               <a:t>Детекция</a:t>
             </a:r>
             <a:r>
-              <a:rPr lang="ru-RU" b="1" dirty="0"/>
+              <a:rPr lang="ru-RU" b="1" dirty="0">
+                <a:solidFill>
+                  <a:srgbClr val="1C1C1C"/>
+                </a:solidFill>
+                <a:latin typeface="Samsung SS Head Bold" pitchFamily="2" charset="0"/>
+                <a:cs typeface="Samsung SS Head Bold" pitchFamily="2" charset="0"/>
+              </a:rPr>
               <a:t> </a:t>
             </a:r>
             <a:r>
-              <a:rPr lang="ru-RU" b="1" dirty="0" err="1"/>
+              <a:rPr lang="ru-RU" b="1" dirty="0" err="1">
+                <a:solidFill>
+                  <a:srgbClr val="1C1C1C"/>
+                </a:solidFill>
+                <a:latin typeface="Samsung SS Head Bold" pitchFamily="2" charset="0"/>
+                <a:cs typeface="Samsung SS Head Bold" pitchFamily="2" charset="0"/>
+              </a:rPr>
               <a:t>ПДн</a:t>
             </a:r>
             <a:br>
-              <a:rPr lang="ru-RU" b="1" dirty="0"/>
+              <a:rPr lang="ru-RU" b="1" dirty="0">
+                <a:solidFill>
+                  <a:srgbClr val="333333"/>
+                </a:solidFill>
+                <a:latin typeface="Samsung SS Head Bold" pitchFamily="2" charset="0"/>
+                <a:cs typeface="Samsung SS Head Bold" pitchFamily="2" charset="0"/>
+              </a:rPr>
             </a:br>
-            <a:endParaRPr lang="ru-RU" dirty="0"/>
+            <a:endParaRPr lang="ru-RU" dirty="0">
+              <a:solidFill>
+                <a:srgbClr val="333333"/>
+              </a:solidFill>
+              <a:latin typeface="Samsung SS Head Bold" pitchFamily="2" charset="0"/>
+              <a:cs typeface="Samsung SS Head Bold" pitchFamily="2" charset="0"/>
+            </a:endParaRPr>
           </a:p>
         </p:txBody>
       </p:sp>
@@ -6677,65 +7707,137 @@
               <a:buNone/>
             </a:pPr>
             <a:r>
-              <a:rPr lang="ru-RU" b="1" dirty="0"/>
+              <a:rPr lang="ru-RU" b="1" dirty="0">
+                <a:solidFill>
+                  <a:srgbClr val="333333"/>
+                </a:solidFill>
+                <a:latin typeface="Samsung SS Body Bold" pitchFamily="2" charset="0"/>
+                <a:cs typeface="Samsung SS Body Bold" pitchFamily="2" charset="0"/>
+              </a:rPr>
               <a:t>Метод обнаружения</a:t>
             </a:r>
-            <a:endParaRPr lang="ru-RU" dirty="0"/>
+            <a:endParaRPr lang="ru-RU" dirty="0">
+              <a:solidFill>
+                <a:srgbClr val="333333"/>
+              </a:solidFill>
+              <a:latin typeface="Samsung SS Body Bold" pitchFamily="2" charset="0"/>
+              <a:cs typeface="Samsung SS Body Bold" pitchFamily="2" charset="0"/>
+            </a:endParaRPr>
           </a:p>
           <a:p>
             <a:pPr marL="0" indent="0">
               <a:buNone/>
             </a:pPr>
             <a:r>
-              <a:rPr lang="ru-RU" dirty="0"/>
+              <a:rPr lang="ru-RU" dirty="0">
+                <a:solidFill>
+                  <a:srgbClr val="5F5F5F"/>
+                </a:solidFill>
+                <a:latin typeface="Samsung SS Body Light" pitchFamily="2" charset="0"/>
+                <a:cs typeface="Samsung SS Body Light" pitchFamily="2" charset="0"/>
+              </a:rPr>
               <a:t>Используются регулярные выражения для:</a:t>
             </a:r>
           </a:p>
           <a:p>
             <a:r>
-              <a:rPr lang="ru-RU" dirty="0"/>
+              <a:rPr lang="ru-RU" dirty="0">
+                <a:solidFill>
+                  <a:srgbClr val="5F5F5F"/>
+                </a:solidFill>
+                <a:latin typeface="Samsung SS Body Light" pitchFamily="2" charset="0"/>
+                <a:cs typeface="Samsung SS Body Light" pitchFamily="2" charset="0"/>
+              </a:rPr>
               <a:t>СНИЛС </a:t>
             </a:r>
           </a:p>
           <a:p>
             <a:r>
-              <a:rPr lang="ru-RU" dirty="0"/>
+              <a:rPr lang="ru-RU" dirty="0">
+                <a:solidFill>
+                  <a:srgbClr val="5F5F5F"/>
+                </a:solidFill>
+                <a:latin typeface="Samsung SS Body Light" pitchFamily="2" charset="0"/>
+                <a:cs typeface="Samsung SS Body Light" pitchFamily="2" charset="0"/>
+              </a:rPr>
               <a:t>Паспорт </a:t>
             </a:r>
           </a:p>
           <a:p>
             <a:r>
-              <a:rPr lang="ru-RU" dirty="0"/>
+              <a:rPr lang="ru-RU" dirty="0">
+                <a:solidFill>
+                  <a:srgbClr val="5F5F5F"/>
+                </a:solidFill>
+                <a:latin typeface="Samsung SS Body Light" pitchFamily="2" charset="0"/>
+                <a:cs typeface="Samsung SS Body Light" pitchFamily="2" charset="0"/>
+              </a:rPr>
               <a:t>ИНН </a:t>
             </a:r>
           </a:p>
           <a:p>
             <a:r>
-              <a:rPr lang="ru-RU" dirty="0"/>
+              <a:rPr lang="ru-RU" dirty="0">
+                <a:solidFill>
+                  <a:srgbClr val="5F5F5F"/>
+                </a:solidFill>
+                <a:latin typeface="Samsung SS Body Light" pitchFamily="2" charset="0"/>
+                <a:cs typeface="Samsung SS Body Light" pitchFamily="2" charset="0"/>
+              </a:rPr>
               <a:t>Телефон </a:t>
             </a:r>
           </a:p>
           <a:p>
             <a:r>
-              <a:rPr lang="ru-RU" dirty="0" err="1"/>
+              <a:rPr lang="ru-RU" dirty="0" err="1">
+                <a:solidFill>
+                  <a:srgbClr val="5F5F5F"/>
+                </a:solidFill>
+                <a:latin typeface="Samsung SS Body Light" pitchFamily="2" charset="0"/>
+                <a:cs typeface="Samsung SS Body Light" pitchFamily="2" charset="0"/>
+              </a:rPr>
               <a:t>Email</a:t>
             </a:r>
-            <a:endParaRPr lang="ru-RU" dirty="0"/>
+            <a:endParaRPr lang="ru-RU" dirty="0">
+              <a:solidFill>
+                <a:srgbClr val="5F5F5F"/>
+              </a:solidFill>
+              <a:latin typeface="Samsung SS Body Light" pitchFamily="2" charset="0"/>
+              <a:cs typeface="Samsung SS Body Light" pitchFamily="2" charset="0"/>
+            </a:endParaRPr>
           </a:p>
           <a:p>
             <a:pPr marL="0" indent="0">
               <a:buNone/>
             </a:pPr>
             <a:r>
-              <a:rPr lang="ru-RU" dirty="0"/>
+              <a:rPr lang="ru-RU" dirty="0">
+                <a:solidFill>
+                  <a:srgbClr val="5F5F5F"/>
+                </a:solidFill>
+                <a:latin typeface="Samsung SS Body Light" pitchFamily="2" charset="0"/>
+                <a:cs typeface="Samsung SS Body Light" pitchFamily="2" charset="0"/>
+              </a:rPr>
               <a:t>Например: </a:t>
             </a:r>
             <a:r>
-              <a:rPr lang="en-US" sz="2600" dirty="0"/>
+              <a:rPr lang="en-US" sz="2600" dirty="0">
+                <a:solidFill>
+                  <a:srgbClr val="5F5F5F"/>
+                </a:solidFill>
+                <a:latin typeface="Samsung SS Body Light" pitchFamily="2" charset="0"/>
+                <a:cs typeface="Samsung SS Body Light" pitchFamily="2" charset="0"/>
+              </a:rPr>
               <a:t>\d{3}-\d{3}-\d{3} \d{2}  (</a:t>
             </a:r>
             <a:r>
-              <a:rPr lang="ru-RU" sz="2600" dirty="0"/>
+              <a:rPr lang="ru-RU" sz="2600" dirty="0">
+                <a:solidFill>
+                  <a:srgbClr val="5F5F5F"/>
+                </a:solidFill>
+                <a:latin typeface="Samsung SS Body Light" pitchFamily="2" charset="0"/>
+                <a:cs typeface="Samsung SS Body Light" pitchFamily="2" charset="0"/>
+              </a:rPr>
               <a:t>СНИЛС)</a:t>
             </a:r>
           </a:p>
@@ -6829,13 +7931,31 @@
           <a:lstStyle/>
           <a:p>
             <a:r>
-              <a:rPr lang="ru-RU" dirty="0"/>
+              <a:rPr lang="ru-RU" dirty="0">
+                <a:solidFill>
+                  <a:srgbClr val="333333"/>
+                </a:solidFill>
+                <a:latin typeface="Samsung SS Head Bold" pitchFamily="2" charset="0"/>
+                <a:cs typeface="Samsung SS Head Bold" pitchFamily="2" charset="0"/>
+              </a:rPr>
               <a:t>Архитектура решения</a:t>
             </a:r>
             <a:br>
-              <a:rPr lang="ru-RU" dirty="0"/>
+              <a:rPr lang="ru-RU" dirty="0">
+                <a:solidFill>
+                  <a:srgbClr val="333333"/>
+                </a:solidFill>
+                <a:latin typeface="Samsung SS Head Bold" pitchFamily="2" charset="0"/>
+                <a:cs typeface="Samsung SS Head Bold" pitchFamily="2" charset="0"/>
+              </a:rPr>
             </a:br>
-            <a:endParaRPr lang="ru-RU" dirty="0"/>
+            <a:endParaRPr lang="ru-RU" dirty="0">
+              <a:solidFill>
+                <a:srgbClr val="333333"/>
+              </a:solidFill>
+              <a:latin typeface="Samsung SS Head Bold" pitchFamily="2" charset="0"/>
+              <a:cs typeface="Samsung SS Head Bold" pitchFamily="2" charset="0"/>
+            </a:endParaRPr>
           </a:p>
         </p:txBody>
       </p:sp>
@@ -6858,7 +7978,7 @@
         <p:spPr>
           <a:xfrm>
             <a:off x="2004646" y="1825625"/>
-            <a:ext cx="4015154" cy="4351338"/>
+            <a:ext cx="4015154" cy="1514180"/>
           </a:xfrm>
         </p:spPr>
         <p:txBody>
@@ -6871,20 +7991,44 @@
               <a:buNone/>
             </a:pPr>
             <a:r>
-              <a:rPr lang="en-US" dirty="0" err="1"/>
+              <a:rPr lang="en-US" dirty="0" err="1">
+                <a:solidFill>
+                  <a:srgbClr val="4D4D4D"/>
+                </a:solidFill>
+                <a:latin typeface="Samsung SS Body Bold" pitchFamily="2" charset="0"/>
+                <a:cs typeface="Samsung SS Body Bold" pitchFamily="2" charset="0"/>
+              </a:rPr>
               <a:t>FileProcessor</a:t>
             </a:r>
-            <a:endParaRPr lang="en-US" dirty="0"/>
-          </a:p>
-          <a:p>
-            <a:r>
-              <a:rPr lang="ru-RU" dirty="0"/>
+            <a:endParaRPr lang="en-US" dirty="0">
+              <a:solidFill>
+                <a:srgbClr val="4D4D4D"/>
+              </a:solidFill>
+              <a:latin typeface="Samsung SS Body Bold" pitchFamily="2" charset="0"/>
+              <a:cs typeface="Samsung SS Body Bold" pitchFamily="2" charset="0"/>
+            </a:endParaRPr>
+          </a:p>
+          <a:p>
+            <a:r>
+              <a:rPr lang="ru-RU" dirty="0">
+                <a:solidFill>
+                  <a:srgbClr val="5F5F5F"/>
+                </a:solidFill>
+                <a:latin typeface="Samsung SS Body Light" pitchFamily="2" charset="0"/>
+                <a:cs typeface="Samsung SS Body Light" pitchFamily="2" charset="0"/>
+              </a:rPr>
               <a:t>поиск файлов</a:t>
             </a:r>
           </a:p>
           <a:p>
             <a:r>
-              <a:rPr lang="ru-RU" dirty="0"/>
+              <a:rPr lang="ru-RU" dirty="0">
+                <a:solidFill>
+                  <a:srgbClr val="5F5F5F"/>
+                </a:solidFill>
+                <a:latin typeface="Samsung SS Body Light" pitchFamily="2" charset="0"/>
+                <a:cs typeface="Samsung SS Body Light" pitchFamily="2" charset="0"/>
+              </a:rPr>
               <a:t>извлечение текста</a:t>
             </a:r>
           </a:p>
@@ -6909,7 +8053,7 @@
         <p:spPr>
           <a:xfrm>
             <a:off x="7189176" y="1825625"/>
-            <a:ext cx="4164624" cy="4351338"/>
+            <a:ext cx="4164624" cy="1023083"/>
           </a:xfrm>
         </p:spPr>
         <p:txBody>
@@ -6922,24 +8066,58 @@
               <a:buNone/>
             </a:pPr>
             <a:r>
-              <a:rPr lang="en-US" dirty="0" err="1"/>
+              <a:rPr lang="en-US" dirty="0" err="1">
+                <a:solidFill>
+                  <a:srgbClr val="4D4D4D"/>
+                </a:solidFill>
+                <a:latin typeface="Samsung SS Body Bold" pitchFamily="2" charset="0"/>
+                <a:cs typeface="Samsung SS Body Bold" pitchFamily="2" charset="0"/>
+              </a:rPr>
               <a:t>PersonalDataDetector</a:t>
             </a:r>
-            <a:endParaRPr lang="en-US" dirty="0"/>
-          </a:p>
-          <a:p>
-            <a:r>
-              <a:rPr lang="ru-RU" dirty="0"/>
+            <a:endParaRPr lang="en-US" dirty="0">
+              <a:solidFill>
+                <a:srgbClr val="4D4D4D"/>
+              </a:solidFill>
+              <a:latin typeface="Samsung SS Body Bold" pitchFamily="2" charset="0"/>
+              <a:cs typeface="Samsung SS Body Bold" pitchFamily="2" charset="0"/>
+            </a:endParaRPr>
+          </a:p>
+          <a:p>
+            <a:r>
+              <a:rPr lang="ru-RU" dirty="0">
+                <a:solidFill>
+                  <a:srgbClr val="5F5F5F"/>
+                </a:solidFill>
+                <a:latin typeface="Samsung SS Body Light" pitchFamily="2" charset="0"/>
+                <a:cs typeface="Samsung SS Body Light" pitchFamily="2" charset="0"/>
+              </a:rPr>
               <a:t>поиск </a:t>
             </a:r>
             <a:r>
-              <a:rPr lang="ru-RU" dirty="0" err="1"/>
+              <a:rPr lang="ru-RU" dirty="0" err="1">
+                <a:solidFill>
+                  <a:srgbClr val="5F5F5F"/>
+                </a:solidFill>
+                <a:latin typeface="Samsung SS Body Light" pitchFamily="2" charset="0"/>
+                <a:cs typeface="Samsung SS Body Light" pitchFamily="2" charset="0"/>
+              </a:rPr>
               <a:t>ПДн</a:t>
             </a:r>
-            <a:endParaRPr lang="ru-RU" dirty="0"/>
-          </a:p>
-          <a:p>
-            <a:endParaRPr lang="ru-RU" dirty="0"/>
+            <a:endParaRPr lang="ru-RU" dirty="0">
+              <a:solidFill>
+                <a:srgbClr val="5F5F5F"/>
+              </a:solidFill>
+              <a:latin typeface="Samsung SS Body Light" pitchFamily="2" charset="0"/>
+              <a:cs typeface="Samsung SS Body Light" pitchFamily="2" charset="0"/>
+            </a:endParaRPr>
+          </a:p>
+          <a:p>
+            <a:endParaRPr lang="ru-RU" dirty="0">
+              <a:solidFill>
+                <a:srgbClr val="5F5F5F"/>
+              </a:solidFill>
+            </a:endParaRPr>
           </a:p>
         </p:txBody>
       </p:sp>

--- a/Hakaton_KK.pptx
+++ b/Hakaton_KK.pptx
@@ -4923,6 +4923,98 @@
           </a:graphicData>
         </a:graphic>
       </p:graphicFrame>
+      <p:sp>
+        <p:nvSpPr>
+          <p:cNvPr id="8" name="Прямоугольник 7">
+            <a:extLst>
+              <a:ext uri="{FF2B5EF4-FFF2-40B4-BE49-F238E27FC236}">
+                <a16:creationId xmlns:a16="http://schemas.microsoft.com/office/drawing/2014/main" id="{E7B96FC0-F63F-4FF6-8DE6-BC9CC7C4630C}"/>
+              </a:ext>
+            </a:extLst>
+          </p:cNvPr>
+          <p:cNvSpPr/>
+          <p:nvPr/>
+        </p:nvSpPr>
+        <p:spPr>
+          <a:xfrm rot="16200000">
+            <a:off x="-5270838" y="3271202"/>
+            <a:ext cx="11205144" cy="531984"/>
+          </a:xfrm>
+          <a:prstGeom prst="rect">
+            <a:avLst/>
+          </a:prstGeom>
+        </p:spPr>
+        <p:style>
+          <a:lnRef idx="2">
+            <a:schemeClr val="accent1">
+              <a:shade val="50000"/>
+            </a:schemeClr>
+          </a:lnRef>
+          <a:fillRef idx="1">
+            <a:schemeClr val="accent1"/>
+          </a:fillRef>
+          <a:effectRef idx="0">
+            <a:schemeClr val="accent1"/>
+          </a:effectRef>
+          <a:fontRef idx="minor">
+            <a:schemeClr val="lt1"/>
+          </a:fontRef>
+        </p:style>
+        <p:txBody>
+          <a:bodyPr rtlCol="0" anchor="ctr"/>
+          <a:lstStyle/>
+          <a:p>
+            <a:pPr algn="ctr"/>
+            <a:endParaRPr lang="ru-RU"/>
+          </a:p>
+        </p:txBody>
+      </p:sp>
+      <p:sp>
+        <p:nvSpPr>
+          <p:cNvPr id="9" name="Прямоугольник 8">
+            <a:extLst>
+              <a:ext uri="{FF2B5EF4-FFF2-40B4-BE49-F238E27FC236}">
+                <a16:creationId xmlns:a16="http://schemas.microsoft.com/office/drawing/2014/main" id="{8BE7FBD4-3D8C-49CF-8D63-7016FBDFA14E}"/>
+              </a:ext>
+            </a:extLst>
+          </p:cNvPr>
+          <p:cNvSpPr/>
+          <p:nvPr/>
+        </p:nvSpPr>
+        <p:spPr>
+          <a:xfrm rot="13317164">
+            <a:off x="5751228" y="99132"/>
+            <a:ext cx="11205144" cy="531984"/>
+          </a:xfrm>
+          <a:prstGeom prst="rect">
+            <a:avLst/>
+          </a:prstGeom>
+        </p:spPr>
+        <p:style>
+          <a:lnRef idx="2">
+            <a:schemeClr val="accent1">
+              <a:shade val="50000"/>
+            </a:schemeClr>
+          </a:lnRef>
+          <a:fillRef idx="1">
+            <a:schemeClr val="accent1"/>
+          </a:fillRef>
+          <a:effectRef idx="0">
+            <a:schemeClr val="accent1"/>
+          </a:effectRef>
+          <a:fontRef idx="minor">
+            <a:schemeClr val="lt1"/>
+          </a:fontRef>
+        </p:style>
+        <p:txBody>
+          <a:bodyPr rtlCol="0" anchor="ctr"/>
+          <a:lstStyle/>
+          <a:p>
+            <a:pPr algn="ctr"/>
+            <a:endParaRPr lang="ru-RU"/>
+          </a:p>
+        </p:txBody>
+      </p:sp>
     </p:spTree>
     <p:extLst>
       <p:ext uri="{BB962C8B-B14F-4D97-AF65-F5344CB8AC3E}">
@@ -5143,6 +5235,98 @@
           </a:p>
         </p:txBody>
       </p:sp>
+      <p:sp>
+        <p:nvSpPr>
+          <p:cNvPr id="4" name="Прямоугольник 3">
+            <a:extLst>
+              <a:ext uri="{FF2B5EF4-FFF2-40B4-BE49-F238E27FC236}">
+                <a16:creationId xmlns:a16="http://schemas.microsoft.com/office/drawing/2014/main" id="{7EEA6BC3-03D6-4EC9-9FA2-0C8E984E5074}"/>
+              </a:ext>
+            </a:extLst>
+          </p:cNvPr>
+          <p:cNvSpPr/>
+          <p:nvPr/>
+        </p:nvSpPr>
+        <p:spPr>
+          <a:xfrm rot="16200000">
+            <a:off x="-5270838" y="3271202"/>
+            <a:ext cx="11205144" cy="531984"/>
+          </a:xfrm>
+          <a:prstGeom prst="rect">
+            <a:avLst/>
+          </a:prstGeom>
+        </p:spPr>
+        <p:style>
+          <a:lnRef idx="2">
+            <a:schemeClr val="accent1">
+              <a:shade val="50000"/>
+            </a:schemeClr>
+          </a:lnRef>
+          <a:fillRef idx="1">
+            <a:schemeClr val="accent1"/>
+          </a:fillRef>
+          <a:effectRef idx="0">
+            <a:schemeClr val="accent1"/>
+          </a:effectRef>
+          <a:fontRef idx="minor">
+            <a:schemeClr val="lt1"/>
+          </a:fontRef>
+        </p:style>
+        <p:txBody>
+          <a:bodyPr rtlCol="0" anchor="ctr"/>
+          <a:lstStyle/>
+          <a:p>
+            <a:pPr algn="ctr"/>
+            <a:endParaRPr lang="ru-RU"/>
+          </a:p>
+        </p:txBody>
+      </p:sp>
+      <p:sp>
+        <p:nvSpPr>
+          <p:cNvPr id="5" name="Прямоугольник 4">
+            <a:extLst>
+              <a:ext uri="{FF2B5EF4-FFF2-40B4-BE49-F238E27FC236}">
+                <a16:creationId xmlns:a16="http://schemas.microsoft.com/office/drawing/2014/main" id="{731045A2-53B2-47BB-A7FD-1F84AAF43B3B}"/>
+              </a:ext>
+            </a:extLst>
+          </p:cNvPr>
+          <p:cNvSpPr/>
+          <p:nvPr/>
+        </p:nvSpPr>
+        <p:spPr>
+          <a:xfrm rot="13317164">
+            <a:off x="5751228" y="99132"/>
+            <a:ext cx="11205144" cy="531984"/>
+          </a:xfrm>
+          <a:prstGeom prst="rect">
+            <a:avLst/>
+          </a:prstGeom>
+        </p:spPr>
+        <p:style>
+          <a:lnRef idx="2">
+            <a:schemeClr val="accent1">
+              <a:shade val="50000"/>
+            </a:schemeClr>
+          </a:lnRef>
+          <a:fillRef idx="1">
+            <a:schemeClr val="accent1"/>
+          </a:fillRef>
+          <a:effectRef idx="0">
+            <a:schemeClr val="accent1"/>
+          </a:effectRef>
+          <a:fontRef idx="minor">
+            <a:schemeClr val="lt1"/>
+          </a:fontRef>
+        </p:style>
+        <p:txBody>
+          <a:bodyPr rtlCol="0" anchor="ctr"/>
+          <a:lstStyle/>
+          <a:p>
+            <a:pPr algn="ctr"/>
+            <a:endParaRPr lang="ru-RU"/>
+          </a:p>
+        </p:txBody>
+      </p:sp>
     </p:spTree>
     <p:extLst>
       <p:ext uri="{BB962C8B-B14F-4D97-AF65-F5344CB8AC3E}">
@@ -5175,6 +5359,52 @@
       </p:grpSpPr>
       <p:sp>
         <p:nvSpPr>
+          <p:cNvPr id="4" name="Прямоугольник 3">
+            <a:extLst>
+              <a:ext uri="{FF2B5EF4-FFF2-40B4-BE49-F238E27FC236}">
+                <a16:creationId xmlns:a16="http://schemas.microsoft.com/office/drawing/2014/main" id="{213A8CC6-EB76-48B2-81D0-50D8C3A97D17}"/>
+              </a:ext>
+            </a:extLst>
+          </p:cNvPr>
+          <p:cNvSpPr/>
+          <p:nvPr/>
+        </p:nvSpPr>
+        <p:spPr>
+          <a:xfrm rot="16200000">
+            <a:off x="-5270838" y="3271202"/>
+            <a:ext cx="11205144" cy="531984"/>
+          </a:xfrm>
+          <a:prstGeom prst="rect">
+            <a:avLst/>
+          </a:prstGeom>
+        </p:spPr>
+        <p:style>
+          <a:lnRef idx="2">
+            <a:schemeClr val="accent1">
+              <a:shade val="50000"/>
+            </a:schemeClr>
+          </a:lnRef>
+          <a:fillRef idx="1">
+            <a:schemeClr val="accent1"/>
+          </a:fillRef>
+          <a:effectRef idx="0">
+            <a:schemeClr val="accent1"/>
+          </a:effectRef>
+          <a:fontRef idx="minor">
+            <a:schemeClr val="lt1"/>
+          </a:fontRef>
+        </p:style>
+        <p:txBody>
+          <a:bodyPr rtlCol="0" anchor="ctr"/>
+          <a:lstStyle/>
+          <a:p>
+            <a:pPr algn="ctr"/>
+            <a:endParaRPr lang="ru-RU"/>
+          </a:p>
+        </p:txBody>
+      </p:sp>
+      <p:sp>
+        <p:nvSpPr>
           <p:cNvPr id="2" name="Заголовок 1">
             <a:extLst>
               <a:ext uri="{FF2B5EF4-FFF2-40B4-BE49-F238E27FC236}">
@@ -5250,6 +5480,52 @@
               </a:rPr>
               <a:t>Полученные результаты подтверждают работоспособность подхода и возможность его дальнейшего развития.</a:t>
             </a:r>
+          </a:p>
+        </p:txBody>
+      </p:sp>
+      <p:sp>
+        <p:nvSpPr>
+          <p:cNvPr id="5" name="Прямоугольник 4">
+            <a:extLst>
+              <a:ext uri="{FF2B5EF4-FFF2-40B4-BE49-F238E27FC236}">
+                <a16:creationId xmlns:a16="http://schemas.microsoft.com/office/drawing/2014/main" id="{EDB6B033-B5ED-41AC-8BA6-E5C9B3DE5B3F}"/>
+              </a:ext>
+            </a:extLst>
+          </p:cNvPr>
+          <p:cNvSpPr/>
+          <p:nvPr/>
+        </p:nvSpPr>
+        <p:spPr>
+          <a:xfrm rot="13317164">
+            <a:off x="5751228" y="99132"/>
+            <a:ext cx="11205144" cy="531984"/>
+          </a:xfrm>
+          <a:prstGeom prst="rect">
+            <a:avLst/>
+          </a:prstGeom>
+        </p:spPr>
+        <p:style>
+          <a:lnRef idx="2">
+            <a:schemeClr val="accent1">
+              <a:shade val="50000"/>
+            </a:schemeClr>
+          </a:lnRef>
+          <a:fillRef idx="1">
+            <a:schemeClr val="accent1"/>
+          </a:fillRef>
+          <a:effectRef idx="0">
+            <a:schemeClr val="accent1"/>
+          </a:effectRef>
+          <a:fontRef idx="minor">
+            <a:schemeClr val="lt1"/>
+          </a:fontRef>
+        </p:style>
+        <p:txBody>
+          <a:bodyPr rtlCol="0" anchor="ctr"/>
+          <a:lstStyle/>
+          <a:p>
+            <a:pPr algn="ctr"/>
+            <a:endParaRPr lang="ru-RU"/>
           </a:p>
         </p:txBody>
       </p:sp>
@@ -5285,6 +5561,52 @@
       </p:grpSpPr>
       <p:sp>
         <p:nvSpPr>
+          <p:cNvPr id="15" name="Прямоугольник 14">
+            <a:extLst>
+              <a:ext uri="{FF2B5EF4-FFF2-40B4-BE49-F238E27FC236}">
+                <a16:creationId xmlns:a16="http://schemas.microsoft.com/office/drawing/2014/main" id="{B3C60AFB-89AA-4AD5-B7F3-DF815D8CD52A}"/>
+              </a:ext>
+            </a:extLst>
+          </p:cNvPr>
+          <p:cNvSpPr/>
+          <p:nvPr/>
+        </p:nvSpPr>
+        <p:spPr>
+          <a:xfrm rot="2259766">
+            <a:off x="3758227" y="705950"/>
+            <a:ext cx="11205144" cy="1969477"/>
+          </a:xfrm>
+          <a:prstGeom prst="rect">
+            <a:avLst/>
+          </a:prstGeom>
+        </p:spPr>
+        <p:style>
+          <a:lnRef idx="2">
+            <a:schemeClr val="accent1">
+              <a:shade val="50000"/>
+            </a:schemeClr>
+          </a:lnRef>
+          <a:fillRef idx="1">
+            <a:schemeClr val="accent1"/>
+          </a:fillRef>
+          <a:effectRef idx="0">
+            <a:schemeClr val="accent1"/>
+          </a:effectRef>
+          <a:fontRef idx="minor">
+            <a:schemeClr val="lt1"/>
+          </a:fontRef>
+        </p:style>
+        <p:txBody>
+          <a:bodyPr rtlCol="0" anchor="ctr"/>
+          <a:lstStyle/>
+          <a:p>
+            <a:pPr algn="ctr"/>
+            <a:endParaRPr lang="ru-RU"/>
+          </a:p>
+        </p:txBody>
+      </p:sp>
+      <p:sp>
+        <p:nvSpPr>
           <p:cNvPr id="2" name="Заголовок 1">
             <a:extLst>
               <a:ext uri="{FF2B5EF4-FFF2-40B4-BE49-F238E27FC236}">
@@ -5320,10 +5642,10 @@
       </p:sp>
       <p:pic>
         <p:nvPicPr>
-          <p:cNvPr id="4" name="Объект 3">
-            <a:extLst>
-              <a:ext uri="{FF2B5EF4-FFF2-40B4-BE49-F238E27FC236}">
-                <a16:creationId xmlns:a16="http://schemas.microsoft.com/office/drawing/2014/main" id="{CEDB91AE-C2BA-4B97-B48F-3179EDDBE15E}"/>
+          <p:cNvPr id="13" name="Объект 12">
+            <a:extLst>
+              <a:ext uri="{FF2B5EF4-FFF2-40B4-BE49-F238E27FC236}">
+                <a16:creationId xmlns:a16="http://schemas.microsoft.com/office/drawing/2014/main" id="{97BB95E6-3F60-4D64-8E01-A9422D1505D3}"/>
               </a:ext>
             </a:extLst>
           </p:cNvPr>
@@ -5335,25 +5657,96 @@
           </p:nvPr>
         </p:nvPicPr>
         <p:blipFill>
-          <a:blip r:embed="rId2">
-            <a:extLst>
-              <a:ext uri="{28A0092B-C50C-407E-A947-70E740481C1C}">
-                <a14:useLocalDpi xmlns:a14="http://schemas.microsoft.com/office/drawing/2010/main" val="0"/>
-              </a:ext>
-            </a:extLst>
-          </a:blip>
+          <a:blip r:embed="rId2"/>
           <a:stretch>
             <a:fillRect/>
           </a:stretch>
         </p:blipFill>
         <p:spPr>
           <a:xfrm>
-            <a:off x="4335884" y="1895963"/>
-            <a:ext cx="3520232" cy="4351338"/>
+            <a:off x="4251602" y="2424299"/>
+            <a:ext cx="3688796" cy="3638364"/>
           </a:xfrm>
           <a:prstGeom prst="rect">
             <a:avLst/>
           </a:prstGeom>
+        </p:spPr>
+      </p:pic>
+      <p:pic>
+        <p:nvPicPr>
+          <p:cNvPr id="14" name="Рисунок 13">
+            <a:extLst>
+              <a:ext uri="{FF2B5EF4-FFF2-40B4-BE49-F238E27FC236}">
+                <a16:creationId xmlns:a16="http://schemas.microsoft.com/office/drawing/2014/main" id="{CDC527CC-FBCE-46CE-8932-9E95BB8ADA26}"/>
+              </a:ext>
+            </a:extLst>
+          </p:cNvPr>
+          <p:cNvPicPr>
+            <a:picLocks noChangeAspect="1"/>
+          </p:cNvPicPr>
+          <p:nvPr/>
+        </p:nvPicPr>
+        <p:blipFill>
+          <a:blip r:embed="rId3"/>
+          <a:stretch>
+            <a:fillRect/>
+          </a:stretch>
+        </p:blipFill>
+        <p:spPr>
+          <a:xfrm>
+            <a:off x="8241166" y="5319712"/>
+            <a:ext cx="2239266" cy="1245592"/>
+          </a:xfrm>
+          <a:prstGeom prst="rect">
+            <a:avLst/>
+          </a:prstGeom>
+        </p:spPr>
+      </p:pic>
+      <p:pic>
+        <p:nvPicPr>
+          <p:cNvPr id="1026" name="Picture 2" descr="Picture background">
+            <a:extLst>
+              <a:ext uri="{FF2B5EF4-FFF2-40B4-BE49-F238E27FC236}">
+                <a16:creationId xmlns:a16="http://schemas.microsoft.com/office/drawing/2014/main" id="{4DF45002-49F6-4846-9AC0-B7B4FCE47C9C}"/>
+              </a:ext>
+            </a:extLst>
+          </p:cNvPr>
+          <p:cNvPicPr>
+            <a:picLocks noChangeAspect="1" noChangeArrowheads="1"/>
+          </p:cNvPicPr>
+          <p:nvPr/>
+        </p:nvPicPr>
+        <p:blipFill>
+          <a:blip r:embed="rId4">
+            <a:extLst>
+              <a:ext uri="{28A0092B-C50C-407E-A947-70E740481C1C}">
+                <a14:useLocalDpi xmlns:a14="http://schemas.microsoft.com/office/drawing/2010/main" val="0"/>
+              </a:ext>
+            </a:extLst>
+          </a:blip>
+          <a:srcRect/>
+          <a:stretch>
+            <a:fillRect/>
+          </a:stretch>
+        </p:blipFill>
+        <p:spPr bwMode="auto">
+          <a:xfrm>
+            <a:off x="1312933" y="4972441"/>
+            <a:ext cx="2788285" cy="1842060"/>
+          </a:xfrm>
+          <a:prstGeom prst="rect">
+            <a:avLst/>
+          </a:prstGeom>
+          <a:noFill/>
+          <a:extLst>
+            <a:ext uri="{909E8E84-426E-40DD-AFC4-6F175D3DCCD1}">
+              <a14:hiddenFill xmlns:a14="http://schemas.microsoft.com/office/drawing/2010/main">
+                <a:solidFill>
+                  <a:srgbClr val="FFFFFF"/>
+                </a:solidFill>
+              </a14:hiddenFill>
+            </a:ext>
+          </a:extLst>
         </p:spPr>
       </p:pic>
     </p:spTree>
@@ -5641,6 +6034,98 @@
           </a:extLst>
         </p:spPr>
       </p:pic>
+      <p:sp>
+        <p:nvSpPr>
+          <p:cNvPr id="5" name="Прямоугольник 4">
+            <a:extLst>
+              <a:ext uri="{FF2B5EF4-FFF2-40B4-BE49-F238E27FC236}">
+                <a16:creationId xmlns:a16="http://schemas.microsoft.com/office/drawing/2014/main" id="{D6D97486-26A5-48E7-8DC9-8BD457537D46}"/>
+              </a:ext>
+            </a:extLst>
+          </p:cNvPr>
+          <p:cNvSpPr/>
+          <p:nvPr/>
+        </p:nvSpPr>
+        <p:spPr>
+          <a:xfrm rot="16200000">
+            <a:off x="-5270838" y="3271202"/>
+            <a:ext cx="11205144" cy="531984"/>
+          </a:xfrm>
+          <a:prstGeom prst="rect">
+            <a:avLst/>
+          </a:prstGeom>
+        </p:spPr>
+        <p:style>
+          <a:lnRef idx="2">
+            <a:schemeClr val="accent1">
+              <a:shade val="50000"/>
+            </a:schemeClr>
+          </a:lnRef>
+          <a:fillRef idx="1">
+            <a:schemeClr val="accent1"/>
+          </a:fillRef>
+          <a:effectRef idx="0">
+            <a:schemeClr val="accent1"/>
+          </a:effectRef>
+          <a:fontRef idx="minor">
+            <a:schemeClr val="lt1"/>
+          </a:fontRef>
+        </p:style>
+        <p:txBody>
+          <a:bodyPr rtlCol="0" anchor="ctr"/>
+          <a:lstStyle/>
+          <a:p>
+            <a:pPr algn="ctr"/>
+            <a:endParaRPr lang="ru-RU"/>
+          </a:p>
+        </p:txBody>
+      </p:sp>
+      <p:sp>
+        <p:nvSpPr>
+          <p:cNvPr id="6" name="Прямоугольник 5">
+            <a:extLst>
+              <a:ext uri="{FF2B5EF4-FFF2-40B4-BE49-F238E27FC236}">
+                <a16:creationId xmlns:a16="http://schemas.microsoft.com/office/drawing/2014/main" id="{6DF6A313-349C-4C54-9CFB-AE1D2C4320FC}"/>
+              </a:ext>
+            </a:extLst>
+          </p:cNvPr>
+          <p:cNvSpPr/>
+          <p:nvPr/>
+        </p:nvSpPr>
+        <p:spPr>
+          <a:xfrm rot="13317164">
+            <a:off x="5751228" y="99132"/>
+            <a:ext cx="11205144" cy="531984"/>
+          </a:xfrm>
+          <a:prstGeom prst="rect">
+            <a:avLst/>
+          </a:prstGeom>
+        </p:spPr>
+        <p:style>
+          <a:lnRef idx="2">
+            <a:schemeClr val="accent1">
+              <a:shade val="50000"/>
+            </a:schemeClr>
+          </a:lnRef>
+          <a:fillRef idx="1">
+            <a:schemeClr val="accent1"/>
+          </a:fillRef>
+          <a:effectRef idx="0">
+            <a:schemeClr val="accent1"/>
+          </a:effectRef>
+          <a:fontRef idx="minor">
+            <a:schemeClr val="lt1"/>
+          </a:fontRef>
+        </p:style>
+        <p:txBody>
+          <a:bodyPr rtlCol="0" anchor="ctr"/>
+          <a:lstStyle/>
+          <a:p>
+            <a:pPr algn="ctr"/>
+            <a:endParaRPr lang="ru-RU"/>
+          </a:p>
+        </p:txBody>
+      </p:sp>
     </p:spTree>
     <p:extLst>
       <p:ext uri="{BB962C8B-B14F-4D97-AF65-F5344CB8AC3E}">
@@ -6198,6 +6683,98 @@
           </a:p>
         </p:txBody>
       </p:sp>
+      <p:sp>
+        <p:nvSpPr>
+          <p:cNvPr id="7" name="Прямоугольник 6">
+            <a:extLst>
+              <a:ext uri="{FF2B5EF4-FFF2-40B4-BE49-F238E27FC236}">
+                <a16:creationId xmlns:a16="http://schemas.microsoft.com/office/drawing/2014/main" id="{6522569C-C592-45EC-9F1C-E804698AF20A}"/>
+              </a:ext>
+            </a:extLst>
+          </p:cNvPr>
+          <p:cNvSpPr/>
+          <p:nvPr/>
+        </p:nvSpPr>
+        <p:spPr>
+          <a:xfrm rot="16200000">
+            <a:off x="-5270838" y="3271202"/>
+            <a:ext cx="11205144" cy="531984"/>
+          </a:xfrm>
+          <a:prstGeom prst="rect">
+            <a:avLst/>
+          </a:prstGeom>
+        </p:spPr>
+        <p:style>
+          <a:lnRef idx="2">
+            <a:schemeClr val="accent1">
+              <a:shade val="50000"/>
+            </a:schemeClr>
+          </a:lnRef>
+          <a:fillRef idx="1">
+            <a:schemeClr val="accent1"/>
+          </a:fillRef>
+          <a:effectRef idx="0">
+            <a:schemeClr val="accent1"/>
+          </a:effectRef>
+          <a:fontRef idx="minor">
+            <a:schemeClr val="lt1"/>
+          </a:fontRef>
+        </p:style>
+        <p:txBody>
+          <a:bodyPr rtlCol="0" anchor="ctr"/>
+          <a:lstStyle/>
+          <a:p>
+            <a:pPr algn="ctr"/>
+            <a:endParaRPr lang="ru-RU"/>
+          </a:p>
+        </p:txBody>
+      </p:sp>
+      <p:sp>
+        <p:nvSpPr>
+          <p:cNvPr id="9" name="Прямоугольник 8">
+            <a:extLst>
+              <a:ext uri="{FF2B5EF4-FFF2-40B4-BE49-F238E27FC236}">
+                <a16:creationId xmlns:a16="http://schemas.microsoft.com/office/drawing/2014/main" id="{0E7E2BEB-9B78-4CC9-A0B8-8FFDC5F346A4}"/>
+              </a:ext>
+            </a:extLst>
+          </p:cNvPr>
+          <p:cNvSpPr/>
+          <p:nvPr/>
+        </p:nvSpPr>
+        <p:spPr>
+          <a:xfrm rot="13317164">
+            <a:off x="5751228" y="99132"/>
+            <a:ext cx="11205144" cy="531984"/>
+          </a:xfrm>
+          <a:prstGeom prst="rect">
+            <a:avLst/>
+          </a:prstGeom>
+        </p:spPr>
+        <p:style>
+          <a:lnRef idx="2">
+            <a:schemeClr val="accent1">
+              <a:shade val="50000"/>
+            </a:schemeClr>
+          </a:lnRef>
+          <a:fillRef idx="1">
+            <a:schemeClr val="accent1"/>
+          </a:fillRef>
+          <a:effectRef idx="0">
+            <a:schemeClr val="accent1"/>
+          </a:effectRef>
+          <a:fontRef idx="minor">
+            <a:schemeClr val="lt1"/>
+          </a:fontRef>
+        </p:style>
+        <p:txBody>
+          <a:bodyPr rtlCol="0" anchor="ctr"/>
+          <a:lstStyle/>
+          <a:p>
+            <a:pPr algn="ctr"/>
+            <a:endParaRPr lang="ru-RU"/>
+          </a:p>
+        </p:txBody>
+      </p:sp>
     </p:spTree>
     <p:extLst>
       <p:ext uri="{BB962C8B-B14F-4D97-AF65-F5344CB8AC3E}">
@@ -6400,6 +6977,98 @@
           </a:extLst>
         </p:spPr>
       </p:pic>
+      <p:sp>
+        <p:nvSpPr>
+          <p:cNvPr id="5" name="Прямоугольник 4">
+            <a:extLst>
+              <a:ext uri="{FF2B5EF4-FFF2-40B4-BE49-F238E27FC236}">
+                <a16:creationId xmlns:a16="http://schemas.microsoft.com/office/drawing/2014/main" id="{1236AA1E-6195-45FC-8134-81D14CE8C1AB}"/>
+              </a:ext>
+            </a:extLst>
+          </p:cNvPr>
+          <p:cNvSpPr/>
+          <p:nvPr/>
+        </p:nvSpPr>
+        <p:spPr>
+          <a:xfrm rot="16200000">
+            <a:off x="-5270838" y="3271202"/>
+            <a:ext cx="11205144" cy="531984"/>
+          </a:xfrm>
+          <a:prstGeom prst="rect">
+            <a:avLst/>
+          </a:prstGeom>
+        </p:spPr>
+        <p:style>
+          <a:lnRef idx="2">
+            <a:schemeClr val="accent1">
+              <a:shade val="50000"/>
+            </a:schemeClr>
+          </a:lnRef>
+          <a:fillRef idx="1">
+            <a:schemeClr val="accent1"/>
+          </a:fillRef>
+          <a:effectRef idx="0">
+            <a:schemeClr val="accent1"/>
+          </a:effectRef>
+          <a:fontRef idx="minor">
+            <a:schemeClr val="lt1"/>
+          </a:fontRef>
+        </p:style>
+        <p:txBody>
+          <a:bodyPr rtlCol="0" anchor="ctr"/>
+          <a:lstStyle/>
+          <a:p>
+            <a:pPr algn="ctr"/>
+            <a:endParaRPr lang="ru-RU"/>
+          </a:p>
+        </p:txBody>
+      </p:sp>
+      <p:sp>
+        <p:nvSpPr>
+          <p:cNvPr id="6" name="Прямоугольник 5">
+            <a:extLst>
+              <a:ext uri="{FF2B5EF4-FFF2-40B4-BE49-F238E27FC236}">
+                <a16:creationId xmlns:a16="http://schemas.microsoft.com/office/drawing/2014/main" id="{B70D6EFC-4125-4C8F-9EB0-2032F57FC1DC}"/>
+              </a:ext>
+            </a:extLst>
+          </p:cNvPr>
+          <p:cNvSpPr/>
+          <p:nvPr/>
+        </p:nvSpPr>
+        <p:spPr>
+          <a:xfrm rot="13317164">
+            <a:off x="5751228" y="99132"/>
+            <a:ext cx="11205144" cy="531984"/>
+          </a:xfrm>
+          <a:prstGeom prst="rect">
+            <a:avLst/>
+          </a:prstGeom>
+        </p:spPr>
+        <p:style>
+          <a:lnRef idx="2">
+            <a:schemeClr val="accent1">
+              <a:shade val="50000"/>
+            </a:schemeClr>
+          </a:lnRef>
+          <a:fillRef idx="1">
+            <a:schemeClr val="accent1"/>
+          </a:fillRef>
+          <a:effectRef idx="0">
+            <a:schemeClr val="accent1"/>
+          </a:effectRef>
+          <a:fontRef idx="minor">
+            <a:schemeClr val="lt1"/>
+          </a:fontRef>
+        </p:style>
+        <p:txBody>
+          <a:bodyPr rtlCol="0" anchor="ctr"/>
+          <a:lstStyle/>
+          <a:p>
+            <a:pPr algn="ctr"/>
+            <a:endParaRPr lang="ru-RU"/>
+          </a:p>
+        </p:txBody>
+      </p:sp>
     </p:spTree>
     <p:extLst>
       <p:ext uri="{BB962C8B-B14F-4D97-AF65-F5344CB8AC3E}">
@@ -6448,7 +7117,7 @@
         </p:nvSpPr>
         <p:spPr>
           <a:xfrm>
-            <a:off x="1473505" y="248153"/>
+            <a:off x="1686865" y="268473"/>
             <a:ext cx="9244989" cy="1600200"/>
           </a:xfrm>
         </p:spPr>
@@ -6504,7 +7173,7 @@
         </p:nvSpPr>
         <p:spPr>
           <a:xfrm>
-            <a:off x="5183188" y="1987062"/>
+            <a:off x="5396548" y="2007382"/>
             <a:ext cx="6172200" cy="3873988"/>
           </a:xfrm>
         </p:spPr>
@@ -6626,7 +7295,7 @@
         </p:blipFill>
         <p:spPr bwMode="auto">
           <a:xfrm>
-            <a:off x="630847" y="2057400"/>
+            <a:off x="844207" y="2077720"/>
             <a:ext cx="1855177" cy="1855177"/>
           </a:xfrm>
           <a:prstGeom prst="rect">
@@ -6673,7 +7342,7 @@
         </p:blipFill>
         <p:spPr bwMode="auto">
           <a:xfrm>
-            <a:off x="2691606" y="2057400"/>
+            <a:off x="2904966" y="2077720"/>
             <a:ext cx="1993886" cy="1855177"/>
           </a:xfrm>
           <a:prstGeom prst="rect">
@@ -6720,7 +7389,7 @@
         </p:blipFill>
         <p:spPr bwMode="auto">
           <a:xfrm>
-            <a:off x="786627" y="3981931"/>
+            <a:off x="999987" y="4002251"/>
             <a:ext cx="1993886" cy="1993886"/>
           </a:xfrm>
           <a:prstGeom prst="rect">
@@ -6767,7 +7436,7 @@
         </p:blipFill>
         <p:spPr bwMode="auto">
           <a:xfrm>
-            <a:off x="2830315" y="4051286"/>
+            <a:off x="3043675" y="4071606"/>
             <a:ext cx="1855177" cy="1855177"/>
           </a:xfrm>
           <a:prstGeom prst="rect">
@@ -6785,6 +7454,98 @@
           </a:extLst>
         </p:spPr>
       </p:pic>
+      <p:sp>
+        <p:nvSpPr>
+          <p:cNvPr id="8" name="Прямоугольник 7">
+            <a:extLst>
+              <a:ext uri="{FF2B5EF4-FFF2-40B4-BE49-F238E27FC236}">
+                <a16:creationId xmlns:a16="http://schemas.microsoft.com/office/drawing/2014/main" id="{13A1D9A4-6A45-48FB-B22C-C8305AC5B08A}"/>
+              </a:ext>
+            </a:extLst>
+          </p:cNvPr>
+          <p:cNvSpPr/>
+          <p:nvPr/>
+        </p:nvSpPr>
+        <p:spPr>
+          <a:xfrm rot="16200000">
+            <a:off x="-5270838" y="3271202"/>
+            <a:ext cx="11205144" cy="531984"/>
+          </a:xfrm>
+          <a:prstGeom prst="rect">
+            <a:avLst/>
+          </a:prstGeom>
+        </p:spPr>
+        <p:style>
+          <a:lnRef idx="2">
+            <a:schemeClr val="accent1">
+              <a:shade val="50000"/>
+            </a:schemeClr>
+          </a:lnRef>
+          <a:fillRef idx="1">
+            <a:schemeClr val="accent1"/>
+          </a:fillRef>
+          <a:effectRef idx="0">
+            <a:schemeClr val="accent1"/>
+          </a:effectRef>
+          <a:fontRef idx="minor">
+            <a:schemeClr val="lt1"/>
+          </a:fontRef>
+        </p:style>
+        <p:txBody>
+          <a:bodyPr rtlCol="0" anchor="ctr"/>
+          <a:lstStyle/>
+          <a:p>
+            <a:pPr algn="ctr"/>
+            <a:endParaRPr lang="ru-RU"/>
+          </a:p>
+        </p:txBody>
+      </p:sp>
+      <p:sp>
+        <p:nvSpPr>
+          <p:cNvPr id="9" name="Прямоугольник 8">
+            <a:extLst>
+              <a:ext uri="{FF2B5EF4-FFF2-40B4-BE49-F238E27FC236}">
+                <a16:creationId xmlns:a16="http://schemas.microsoft.com/office/drawing/2014/main" id="{0383D2A6-6B54-4377-844D-6FCF47731DBF}"/>
+              </a:ext>
+            </a:extLst>
+          </p:cNvPr>
+          <p:cNvSpPr/>
+          <p:nvPr/>
+        </p:nvSpPr>
+        <p:spPr>
+          <a:xfrm rot="13317164">
+            <a:off x="5751228" y="99132"/>
+            <a:ext cx="11205144" cy="531984"/>
+          </a:xfrm>
+          <a:prstGeom prst="rect">
+            <a:avLst/>
+          </a:prstGeom>
+        </p:spPr>
+        <p:style>
+          <a:lnRef idx="2">
+            <a:schemeClr val="accent1">
+              <a:shade val="50000"/>
+            </a:schemeClr>
+          </a:lnRef>
+          <a:fillRef idx="1">
+            <a:schemeClr val="accent1"/>
+          </a:fillRef>
+          <a:effectRef idx="0">
+            <a:schemeClr val="accent1"/>
+          </a:effectRef>
+          <a:fontRef idx="minor">
+            <a:schemeClr val="lt1"/>
+          </a:fontRef>
+        </p:style>
+        <p:txBody>
+          <a:bodyPr rtlCol="0" anchor="ctr"/>
+          <a:lstStyle/>
+          <a:p>
+            <a:pPr algn="ctr"/>
+            <a:endParaRPr lang="ru-RU"/>
+          </a:p>
+        </p:txBody>
+      </p:sp>
     </p:spTree>
     <p:extLst>
       <p:ext uri="{BB962C8B-B14F-4D97-AF65-F5344CB8AC3E}">
@@ -7196,6 +7957,98 @@
           </a:p>
         </p:txBody>
       </p:sp>
+      <p:sp>
+        <p:nvSpPr>
+          <p:cNvPr id="7" name="Прямоугольник 6">
+            <a:extLst>
+              <a:ext uri="{FF2B5EF4-FFF2-40B4-BE49-F238E27FC236}">
+                <a16:creationId xmlns:a16="http://schemas.microsoft.com/office/drawing/2014/main" id="{C295ADD3-E827-4108-B70F-03C85E56CE0F}"/>
+              </a:ext>
+            </a:extLst>
+          </p:cNvPr>
+          <p:cNvSpPr/>
+          <p:nvPr/>
+        </p:nvSpPr>
+        <p:spPr>
+          <a:xfrm rot="16200000">
+            <a:off x="-5270838" y="3271202"/>
+            <a:ext cx="11205144" cy="531984"/>
+          </a:xfrm>
+          <a:prstGeom prst="rect">
+            <a:avLst/>
+          </a:prstGeom>
+        </p:spPr>
+        <p:style>
+          <a:lnRef idx="2">
+            <a:schemeClr val="accent1">
+              <a:shade val="50000"/>
+            </a:schemeClr>
+          </a:lnRef>
+          <a:fillRef idx="1">
+            <a:schemeClr val="accent1"/>
+          </a:fillRef>
+          <a:effectRef idx="0">
+            <a:schemeClr val="accent1"/>
+          </a:effectRef>
+          <a:fontRef idx="minor">
+            <a:schemeClr val="lt1"/>
+          </a:fontRef>
+        </p:style>
+        <p:txBody>
+          <a:bodyPr rtlCol="0" anchor="ctr"/>
+          <a:lstStyle/>
+          <a:p>
+            <a:pPr algn="ctr"/>
+            <a:endParaRPr lang="ru-RU"/>
+          </a:p>
+        </p:txBody>
+      </p:sp>
+      <p:sp>
+        <p:nvSpPr>
+          <p:cNvPr id="10" name="Прямоугольник 9">
+            <a:extLst>
+              <a:ext uri="{FF2B5EF4-FFF2-40B4-BE49-F238E27FC236}">
+                <a16:creationId xmlns:a16="http://schemas.microsoft.com/office/drawing/2014/main" id="{B4A2D749-32D7-4F3D-90CD-1914900AA871}"/>
+              </a:ext>
+            </a:extLst>
+          </p:cNvPr>
+          <p:cNvSpPr/>
+          <p:nvPr/>
+        </p:nvSpPr>
+        <p:spPr>
+          <a:xfrm rot="13317164">
+            <a:off x="5751228" y="99132"/>
+            <a:ext cx="11205144" cy="531984"/>
+          </a:xfrm>
+          <a:prstGeom prst="rect">
+            <a:avLst/>
+          </a:prstGeom>
+        </p:spPr>
+        <p:style>
+          <a:lnRef idx="2">
+            <a:schemeClr val="accent1">
+              <a:shade val="50000"/>
+            </a:schemeClr>
+          </a:lnRef>
+          <a:fillRef idx="1">
+            <a:schemeClr val="accent1"/>
+          </a:fillRef>
+          <a:effectRef idx="0">
+            <a:schemeClr val="accent1"/>
+          </a:effectRef>
+          <a:fontRef idx="minor">
+            <a:schemeClr val="lt1"/>
+          </a:fontRef>
+        </p:style>
+        <p:txBody>
+          <a:bodyPr rtlCol="0" anchor="ctr"/>
+          <a:lstStyle/>
+          <a:p>
+            <a:pPr algn="ctr"/>
+            <a:endParaRPr lang="ru-RU"/>
+          </a:p>
+        </p:txBody>
+      </p:sp>
     </p:spTree>
     <p:extLst>
       <p:ext uri="{BB962C8B-B14F-4D97-AF65-F5344CB8AC3E}">
@@ -7574,6 +8427,98 @@
           </a:prstGeom>
         </p:spPr>
       </p:pic>
+      <p:sp>
+        <p:nvSpPr>
+          <p:cNvPr id="8" name="Прямоугольник 7">
+            <a:extLst>
+              <a:ext uri="{FF2B5EF4-FFF2-40B4-BE49-F238E27FC236}">
+                <a16:creationId xmlns:a16="http://schemas.microsoft.com/office/drawing/2014/main" id="{F9B3BC14-30EF-4E53-94C6-92705D6B7352}"/>
+              </a:ext>
+            </a:extLst>
+          </p:cNvPr>
+          <p:cNvSpPr/>
+          <p:nvPr/>
+        </p:nvSpPr>
+        <p:spPr>
+          <a:xfrm rot="16200000">
+            <a:off x="-5270838" y="3271202"/>
+            <a:ext cx="11205144" cy="531984"/>
+          </a:xfrm>
+          <a:prstGeom prst="rect">
+            <a:avLst/>
+          </a:prstGeom>
+        </p:spPr>
+        <p:style>
+          <a:lnRef idx="2">
+            <a:schemeClr val="accent1">
+              <a:shade val="50000"/>
+            </a:schemeClr>
+          </a:lnRef>
+          <a:fillRef idx="1">
+            <a:schemeClr val="accent1"/>
+          </a:fillRef>
+          <a:effectRef idx="0">
+            <a:schemeClr val="accent1"/>
+          </a:effectRef>
+          <a:fontRef idx="minor">
+            <a:schemeClr val="lt1"/>
+          </a:fontRef>
+        </p:style>
+        <p:txBody>
+          <a:bodyPr rtlCol="0" anchor="ctr"/>
+          <a:lstStyle/>
+          <a:p>
+            <a:pPr algn="ctr"/>
+            <a:endParaRPr lang="ru-RU"/>
+          </a:p>
+        </p:txBody>
+      </p:sp>
+      <p:sp>
+        <p:nvSpPr>
+          <p:cNvPr id="10" name="Прямоугольник 9">
+            <a:extLst>
+              <a:ext uri="{FF2B5EF4-FFF2-40B4-BE49-F238E27FC236}">
+                <a16:creationId xmlns:a16="http://schemas.microsoft.com/office/drawing/2014/main" id="{2E92EA7D-81A7-485B-BF32-4E0BD447C595}"/>
+              </a:ext>
+            </a:extLst>
+          </p:cNvPr>
+          <p:cNvSpPr/>
+          <p:nvPr/>
+        </p:nvSpPr>
+        <p:spPr>
+          <a:xfrm rot="13317164">
+            <a:off x="5751228" y="99132"/>
+            <a:ext cx="11205144" cy="531984"/>
+          </a:xfrm>
+          <a:prstGeom prst="rect">
+            <a:avLst/>
+          </a:prstGeom>
+        </p:spPr>
+        <p:style>
+          <a:lnRef idx="2">
+            <a:schemeClr val="accent1">
+              <a:shade val="50000"/>
+            </a:schemeClr>
+          </a:lnRef>
+          <a:fillRef idx="1">
+            <a:schemeClr val="accent1"/>
+          </a:fillRef>
+          <a:effectRef idx="0">
+            <a:schemeClr val="accent1"/>
+          </a:effectRef>
+          <a:fontRef idx="minor">
+            <a:schemeClr val="lt1"/>
+          </a:fontRef>
+        </p:style>
+        <p:txBody>
+          <a:bodyPr rtlCol="0" anchor="ctr"/>
+          <a:lstStyle/>
+          <a:p>
+            <a:pPr algn="ctr"/>
+            <a:endParaRPr lang="ru-RU"/>
+          </a:p>
+        </p:txBody>
+      </p:sp>
     </p:spTree>
     <p:extLst>
       <p:ext uri="{BB962C8B-B14F-4D97-AF65-F5344CB8AC3E}">
@@ -7879,6 +8824,98 @@
           </a:prstGeom>
         </p:spPr>
       </p:pic>
+      <p:sp>
+        <p:nvSpPr>
+          <p:cNvPr id="5" name="Прямоугольник 4">
+            <a:extLst>
+              <a:ext uri="{FF2B5EF4-FFF2-40B4-BE49-F238E27FC236}">
+                <a16:creationId xmlns:a16="http://schemas.microsoft.com/office/drawing/2014/main" id="{58A60F10-A4CA-481B-9633-784D54F0229A}"/>
+              </a:ext>
+            </a:extLst>
+          </p:cNvPr>
+          <p:cNvSpPr/>
+          <p:nvPr/>
+        </p:nvSpPr>
+        <p:spPr>
+          <a:xfrm rot="16200000">
+            <a:off x="-5270838" y="3271202"/>
+            <a:ext cx="11205144" cy="531984"/>
+          </a:xfrm>
+          <a:prstGeom prst="rect">
+            <a:avLst/>
+          </a:prstGeom>
+        </p:spPr>
+        <p:style>
+          <a:lnRef idx="2">
+            <a:schemeClr val="accent1">
+              <a:shade val="50000"/>
+            </a:schemeClr>
+          </a:lnRef>
+          <a:fillRef idx="1">
+            <a:schemeClr val="accent1"/>
+          </a:fillRef>
+          <a:effectRef idx="0">
+            <a:schemeClr val="accent1"/>
+          </a:effectRef>
+          <a:fontRef idx="minor">
+            <a:schemeClr val="lt1"/>
+          </a:fontRef>
+        </p:style>
+        <p:txBody>
+          <a:bodyPr rtlCol="0" anchor="ctr"/>
+          <a:lstStyle/>
+          <a:p>
+            <a:pPr algn="ctr"/>
+            <a:endParaRPr lang="ru-RU"/>
+          </a:p>
+        </p:txBody>
+      </p:sp>
+      <p:sp>
+        <p:nvSpPr>
+          <p:cNvPr id="7" name="Прямоугольник 6">
+            <a:extLst>
+              <a:ext uri="{FF2B5EF4-FFF2-40B4-BE49-F238E27FC236}">
+                <a16:creationId xmlns:a16="http://schemas.microsoft.com/office/drawing/2014/main" id="{28FF1D02-4D05-4C38-981F-B58AC08B61DD}"/>
+              </a:ext>
+            </a:extLst>
+          </p:cNvPr>
+          <p:cNvSpPr/>
+          <p:nvPr/>
+        </p:nvSpPr>
+        <p:spPr>
+          <a:xfrm rot="13317164">
+            <a:off x="5751228" y="99132"/>
+            <a:ext cx="11205144" cy="531984"/>
+          </a:xfrm>
+          <a:prstGeom prst="rect">
+            <a:avLst/>
+          </a:prstGeom>
+        </p:spPr>
+        <p:style>
+          <a:lnRef idx="2">
+            <a:schemeClr val="accent1">
+              <a:shade val="50000"/>
+            </a:schemeClr>
+          </a:lnRef>
+          <a:fillRef idx="1">
+            <a:schemeClr val="accent1"/>
+          </a:fillRef>
+          <a:effectRef idx="0">
+            <a:schemeClr val="accent1"/>
+          </a:effectRef>
+          <a:fontRef idx="minor">
+            <a:schemeClr val="lt1"/>
+          </a:fontRef>
+        </p:style>
+        <p:txBody>
+          <a:bodyPr rtlCol="0" anchor="ctr"/>
+          <a:lstStyle/>
+          <a:p>
+            <a:pPr algn="ctr"/>
+            <a:endParaRPr lang="ru-RU"/>
+          </a:p>
+        </p:txBody>
+      </p:sp>
     </p:spTree>
     <p:extLst>
       <p:ext uri="{BB962C8B-B14F-4D97-AF65-F5344CB8AC3E}">
@@ -8187,6 +9224,98 @@
           </a:prstGeom>
         </p:spPr>
       </p:pic>
+      <p:sp>
+        <p:nvSpPr>
+          <p:cNvPr id="8" name="Прямоугольник 7">
+            <a:extLst>
+              <a:ext uri="{FF2B5EF4-FFF2-40B4-BE49-F238E27FC236}">
+                <a16:creationId xmlns:a16="http://schemas.microsoft.com/office/drawing/2014/main" id="{81965CA2-123C-4054-B137-9551F02D3ADC}"/>
+              </a:ext>
+            </a:extLst>
+          </p:cNvPr>
+          <p:cNvSpPr/>
+          <p:nvPr/>
+        </p:nvSpPr>
+        <p:spPr>
+          <a:xfrm rot="16200000">
+            <a:off x="-5270838" y="3271202"/>
+            <a:ext cx="11205144" cy="531984"/>
+          </a:xfrm>
+          <a:prstGeom prst="rect">
+            <a:avLst/>
+          </a:prstGeom>
+        </p:spPr>
+        <p:style>
+          <a:lnRef idx="2">
+            <a:schemeClr val="accent1">
+              <a:shade val="50000"/>
+            </a:schemeClr>
+          </a:lnRef>
+          <a:fillRef idx="1">
+            <a:schemeClr val="accent1"/>
+          </a:fillRef>
+          <a:effectRef idx="0">
+            <a:schemeClr val="accent1"/>
+          </a:effectRef>
+          <a:fontRef idx="minor">
+            <a:schemeClr val="lt1"/>
+          </a:fontRef>
+        </p:style>
+        <p:txBody>
+          <a:bodyPr rtlCol="0" anchor="ctr"/>
+          <a:lstStyle/>
+          <a:p>
+            <a:pPr algn="ctr"/>
+            <a:endParaRPr lang="ru-RU"/>
+          </a:p>
+        </p:txBody>
+      </p:sp>
+      <p:sp>
+        <p:nvSpPr>
+          <p:cNvPr id="9" name="Прямоугольник 8">
+            <a:extLst>
+              <a:ext uri="{FF2B5EF4-FFF2-40B4-BE49-F238E27FC236}">
+                <a16:creationId xmlns:a16="http://schemas.microsoft.com/office/drawing/2014/main" id="{89F364A2-2CF2-4B21-BAEA-9C69197D3944}"/>
+              </a:ext>
+            </a:extLst>
+          </p:cNvPr>
+          <p:cNvSpPr/>
+          <p:nvPr/>
+        </p:nvSpPr>
+        <p:spPr>
+          <a:xfrm rot="13317164">
+            <a:off x="5751228" y="99132"/>
+            <a:ext cx="11205144" cy="531984"/>
+          </a:xfrm>
+          <a:prstGeom prst="rect">
+            <a:avLst/>
+          </a:prstGeom>
+        </p:spPr>
+        <p:style>
+          <a:lnRef idx="2">
+            <a:schemeClr val="accent1">
+              <a:shade val="50000"/>
+            </a:schemeClr>
+          </a:lnRef>
+          <a:fillRef idx="1">
+            <a:schemeClr val="accent1"/>
+          </a:fillRef>
+          <a:effectRef idx="0">
+            <a:schemeClr val="accent1"/>
+          </a:effectRef>
+          <a:fontRef idx="minor">
+            <a:schemeClr val="lt1"/>
+          </a:fontRef>
+        </p:style>
+        <p:txBody>
+          <a:bodyPr rtlCol="0" anchor="ctr"/>
+          <a:lstStyle/>
+          <a:p>
+            <a:pPr algn="ctr"/>
+            <a:endParaRPr lang="ru-RU"/>
+          </a:p>
+        </p:txBody>
+      </p:sp>
     </p:spTree>
     <p:extLst>
       <p:ext uri="{BB962C8B-B14F-4D97-AF65-F5344CB8AC3E}">
